--- a/In.Plan DP process 06-09-2026.pptx
+++ b/In.Plan DP process 06-09-2026.pptx
@@ -3211,7 +3211,7 @@
         <p:spPr>
           <a:xfrm>
             <a:off x="1940000" y="1760000"/>
-            <a:ext cx="1910000" cy="672000"/>
+            <a:ext cx="1910000" cy="1008000"/>
           </a:xfrm>
           <a:prstGeom prst="rect">
             <a:avLst/>
@@ -3245,6 +3245,12 @@
             <a:r>
               <a:rPr sz="900" b="0"/>
               <a:t>Исключения планеру</a:t>
+            </a:r>
+          </a:p>
+          <a:p>
+            <a:r>
+              <a:rPr sz="900" b="0"/>
+              <a:t>Разделение потоков: рынок / внутренний передел / экспорт</a:t>
             </a:r>
           </a:p>
         </p:txBody>
@@ -4160,7 +4166,7 @@
             <a:pPr algn="ctr"/>
             <a:r>
               <a:rPr sz="1000"/>
-              <a:t>Публикация и анализ точности</a:t>
+              <a:t>Публикация плана спроса</a:t>
             </a:r>
           </a:p>
         </p:txBody>
@@ -4174,7 +4180,7 @@
         <p:spPr>
           <a:xfrm>
             <a:off x="10180000" y="1760000"/>
-            <a:ext cx="1910000" cy="672000"/>
+            <a:ext cx="1910000" cy="504000"/>
           </a:xfrm>
           <a:prstGeom prst="rect">
             <a:avLst/>
@@ -4201,33 +4207,27 @@
           <a:p>
             <a:r>
               <a:rPr sz="900" b="0"/>
-              <a:t>FA, MAPE, BIAS, алерты</a:t>
-            </a:r>
-          </a:p>
-          <a:p>
-            <a:r>
-              <a:rPr sz="900" b="0"/>
-              <a:t>Разрыв с планом SNP → решение</a:t>
-            </a:r>
-          </a:p>
-        </p:txBody>
-      </p:sp>
-      <p:sp>
-        <p:nvSpPr>
-          <p:cNvPr id="30" name="Rectangle 29"/>
+              <a:t>Версия и дата фиксации плана</a:t>
+            </a:r>
+          </a:p>
+        </p:txBody>
+      </p:sp>
+      <p:sp>
+        <p:nvSpPr>
+          <p:cNvPr id="30" name="Rounded Rectangle 29"/>
           <p:cNvSpPr/>
           <p:nvPr/>
         </p:nvSpPr>
         <p:spPr>
           <a:xfrm>
-            <a:off x="10180000" y="2582000"/>
+            <a:off x="10180000" y="2414000"/>
             <a:ext cx="1910000" cy="620000"/>
           </a:xfrm>
-          <a:prstGeom prst="rect">
+          <a:prstGeom prst="roundRect">
             <a:avLst/>
           </a:prstGeom>
           <a:solidFill>
-            <a:schemeClr val="accent2"/>
+            <a:schemeClr val="accent1"/>
           </a:solidFill>
         </p:spPr>
         <p:style>
@@ -4250,28 +4250,75 @@
           <a:p>
             <a:pPr algn="ctr"/>
             <a:r>
-              <a:rPr sz="900"/>
-              <a:t>Передача неограниченного плана спроса в SNP и MEIO</a:t>
-            </a:r>
-          </a:p>
-        </p:txBody>
-      </p:sp>
-      <p:sp>
-        <p:nvSpPr>
-          <p:cNvPr id="31" name="Rectangle 30"/>
+              <a:rPr sz="1000"/>
+              <a:t>Сверка с ограниченным планом SNP и решение по разрыву</a:t>
+            </a:r>
+          </a:p>
+        </p:txBody>
+      </p:sp>
+      <p:sp>
+        <p:nvSpPr>
+          <p:cNvPr id="31" name="TextBox 30"/>
+          <p:cNvSpPr txBox="1"/>
+          <p:nvPr/>
+        </p:nvSpPr>
+        <p:spPr>
+          <a:xfrm>
+            <a:off x="10180000" y="3134000"/>
+            <a:ext cx="1910000" cy="672000"/>
+          </a:xfrm>
+          <a:prstGeom prst="rect">
+            <a:avLst/>
+          </a:prstGeom>
+          <a:noFill/>
+        </p:spPr>
+        <p:txBody>
+          <a:bodyPr wrap="square">
+            <a:spAutoFit/>
+          </a:bodyPr>
+          <a:lstStyle/>
+          <a:p>
+            <a:r>
+              <a:rPr sz="900" b="0"/>
+              <a:t>Ограниченный план из SNP</a:t>
+            </a:r>
+          </a:p>
+          <a:p>
+            <a:r>
+              <a:rPr sz="900" b="0"/>
+              <a:t>Дефициты и избытки по периодам</a:t>
+            </a:r>
+          </a:p>
+          <a:p>
+            <a:r>
+              <a:rPr sz="900" b="0"/>
+              <a:t>Приоритизация клиентов и SKU</a:t>
+            </a:r>
+          </a:p>
+          <a:p>
+            <a:r>
+              <a:rPr sz="900" b="0"/>
+              <a:t>Решение по разрыву</a:t>
+            </a:r>
+          </a:p>
+        </p:txBody>
+      </p:sp>
+      <p:sp>
+        <p:nvSpPr>
+          <p:cNvPr id="32" name="Rounded Rectangle 31"/>
           <p:cNvSpPr/>
           <p:nvPr/>
         </p:nvSpPr>
         <p:spPr>
           <a:xfrm>
-            <a:off x="100000" y="980000"/>
-            <a:ext cx="1600000" cy="620000"/>
-          </a:xfrm>
-          <a:prstGeom prst="rect">
+            <a:off x="10180000" y="3956000"/>
+            <a:ext cx="1910000" cy="620000"/>
+          </a:xfrm>
+          <a:prstGeom prst="roundRect">
             <a:avLst/>
           </a:prstGeom>
           <a:solidFill>
-            <a:schemeClr val="accent2"/>
+            <a:schemeClr val="accent1"/>
           </a:solidFill>
         </p:spPr>
         <p:style>
@@ -4294,22 +4341,69 @@
           <a:p>
             <a:pPr algn="ctr"/>
             <a:r>
-              <a:rPr sz="900"/>
-              <a:t>История продаж и заказы из ERP / DWH</a:t>
-            </a:r>
-          </a:p>
-        </p:txBody>
-      </p:sp>
-      <p:sp>
-        <p:nvSpPr>
-          <p:cNvPr id="32" name="Rectangle 31"/>
+              <a:rPr sz="1000"/>
+              <a:t>Контроль точности и FVA</a:t>
+            </a:r>
+          </a:p>
+        </p:txBody>
+      </p:sp>
+      <p:sp>
+        <p:nvSpPr>
+          <p:cNvPr id="33" name="TextBox 32"/>
+          <p:cNvSpPr txBox="1"/>
+          <p:nvPr/>
+        </p:nvSpPr>
+        <p:spPr>
+          <a:xfrm>
+            <a:off x="10180000" y="4676000"/>
+            <a:ext cx="1910000" cy="1008000"/>
+          </a:xfrm>
+          <a:prstGeom prst="rect">
+            <a:avLst/>
+          </a:prstGeom>
+          <a:noFill/>
+        </p:spPr>
+        <p:txBody>
+          <a:bodyPr wrap="square">
+            <a:spAutoFit/>
+          </a:bodyPr>
+          <a:lstStyle/>
+          <a:p>
+            <a:r>
+              <a:rPr sz="900" b="0"/>
+              <a:t>FA, MAPE, BIAS, WAPE по версии и лагу</a:t>
+            </a:r>
+          </a:p>
+          <a:p>
+            <a:r>
+              <a:rPr sz="900" b="0"/>
+              <a:t>FVA: наивный → статистика → Building Blocks → консенсус</a:t>
+            </a:r>
+          </a:p>
+          <a:p>
+            <a:r>
+              <a:rPr sz="900" b="0"/>
+              <a:t>BIAS по авторам корректировок</a:t>
+            </a:r>
+          </a:p>
+          <a:p>
+            <a:r>
+              <a:rPr sz="900" b="0"/>
+              <a:t>Алерты точности и разбор причин</a:t>
+            </a:r>
+          </a:p>
+        </p:txBody>
+      </p:sp>
+      <p:sp>
+        <p:nvSpPr>
+          <p:cNvPr id="34" name="Rectangle 33"/>
           <p:cNvSpPr/>
           <p:nvPr/>
         </p:nvSpPr>
         <p:spPr>
           <a:xfrm>
-            <a:off x="100000" y="2200000"/>
-            <a:ext cx="1600000" cy="620000"/>
+            <a:off x="10180000" y="5834000"/>
+            <a:ext cx="1910000" cy="620000"/>
           </a:xfrm>
           <a:prstGeom prst="rect">
             <a:avLst/>
@@ -4339,20 +4433,20 @@
             <a:pPr algn="ctr"/>
             <a:r>
               <a:rPr sz="900"/>
-              <a:t>Промо-план из TPM/NRM</a:t>
-            </a:r>
-          </a:p>
-        </p:txBody>
-      </p:sp>
-      <p:sp>
-        <p:nvSpPr>
-          <p:cNvPr id="33" name="Rectangle 32"/>
+              <a:t>Передача неограниченного плана спроса в SNP и MEIO</a:t>
+            </a:r>
+          </a:p>
+        </p:txBody>
+      </p:sp>
+      <p:sp>
+        <p:nvSpPr>
+          <p:cNvPr id="35" name="Rectangle 34"/>
           <p:cNvSpPr/>
           <p:nvPr/>
         </p:nvSpPr>
         <p:spPr>
           <a:xfrm>
-            <a:off x="100000" y="3420000"/>
+            <a:off x="100000" y="980000"/>
             <a:ext cx="1600000" cy="620000"/>
           </a:xfrm>
           <a:prstGeom prst="rect">
@@ -4383,20 +4477,20 @@
             <a:pPr algn="ctr"/>
             <a:r>
               <a:rPr sz="900"/>
-              <a:t>Категорийный менеджмент: проверка Building Blocks</a:t>
-            </a:r>
-          </a:p>
-        </p:txBody>
-      </p:sp>
-      <p:sp>
-        <p:nvSpPr>
-          <p:cNvPr id="34" name="Rectangle 33"/>
+              <a:t>История продаж и заказы из ERP / DWH</a:t>
+            </a:r>
+          </a:p>
+        </p:txBody>
+      </p:sp>
+      <p:sp>
+        <p:nvSpPr>
+          <p:cNvPr id="36" name="Rectangle 35"/>
           <p:cNvSpPr/>
           <p:nvPr/>
         </p:nvSpPr>
         <p:spPr>
           <a:xfrm>
-            <a:off x="100000" y="4640000"/>
+            <a:off x="100000" y="1677142"/>
             <a:ext cx="1600000" cy="620000"/>
           </a:xfrm>
           <a:prstGeom prst="rect">
@@ -4427,20 +4521,20 @@
             <a:pPr algn="ctr"/>
             <a:r>
               <a:rPr sz="900"/>
-              <a:t>Коммерческие финансы: консенсус-прогноз в деньгах</a:t>
-            </a:r>
-          </a:p>
-        </p:txBody>
-      </p:sp>
-      <p:sp>
-        <p:nvSpPr>
-          <p:cNvPr id="35" name="Rectangle 34"/>
+              <a:t>План производства собственной переработки из SNP и PS</a:t>
+            </a:r>
+          </a:p>
+        </p:txBody>
+      </p:sp>
+      <p:sp>
+        <p:nvSpPr>
+          <p:cNvPr id="37" name="Rectangle 36"/>
           <p:cNvSpPr/>
           <p:nvPr/>
         </p:nvSpPr>
         <p:spPr>
           <a:xfrm>
-            <a:off x="100000" y="5860000"/>
+            <a:off x="100000" y="2374284"/>
             <a:ext cx="1600000" cy="620000"/>
           </a:xfrm>
           <a:prstGeom prst="rect">
@@ -4471,6 +4565,226 @@
             <a:pPr algn="ctr"/>
             <a:r>
               <a:rPr sz="900"/>
+              <a:t>Промо-план из TPM/NRM</a:t>
+            </a:r>
+          </a:p>
+        </p:txBody>
+      </p:sp>
+      <p:sp>
+        <p:nvSpPr>
+          <p:cNvPr id="38" name="Rectangle 37"/>
+          <p:cNvSpPr/>
+          <p:nvPr/>
+        </p:nvSpPr>
+        <p:spPr>
+          <a:xfrm>
+            <a:off x="100000" y="3071426"/>
+            <a:ext cx="1600000" cy="620000"/>
+          </a:xfrm>
+          <a:prstGeom prst="rect">
+            <a:avLst/>
+          </a:prstGeom>
+          <a:solidFill>
+            <a:schemeClr val="accent2"/>
+          </a:solidFill>
+        </p:spPr>
+        <p:style>
+          <a:lnRef idx="1">
+            <a:schemeClr val="accent1"/>
+          </a:lnRef>
+          <a:fillRef idx="3">
+            <a:schemeClr val="accent1"/>
+          </a:fillRef>
+          <a:effectRef idx="2">
+            <a:schemeClr val="accent1"/>
+          </a:effectRef>
+          <a:fontRef idx="minor">
+            <a:schemeClr val="lt1"/>
+          </a:fontRef>
+        </p:style>
+        <p:txBody>
+          <a:bodyPr rtlCol="0" anchor="ctr" wrap="square"/>
+          <a:lstStyle/>
+          <a:p>
+            <a:pPr algn="ctr"/>
+            <a:r>
+              <a:rPr sz="900"/>
+              <a:t>Sell-Out и остатки клиента из ERP</a:t>
+            </a:r>
+          </a:p>
+        </p:txBody>
+      </p:sp>
+      <p:sp>
+        <p:nvSpPr>
+          <p:cNvPr id="39" name="Rectangle 38"/>
+          <p:cNvSpPr/>
+          <p:nvPr/>
+        </p:nvSpPr>
+        <p:spPr>
+          <a:xfrm>
+            <a:off x="100000" y="3768568"/>
+            <a:ext cx="1600000" cy="620000"/>
+          </a:xfrm>
+          <a:prstGeom prst="rect">
+            <a:avLst/>
+          </a:prstGeom>
+          <a:solidFill>
+            <a:schemeClr val="accent2"/>
+          </a:solidFill>
+        </p:spPr>
+        <p:style>
+          <a:lnRef idx="1">
+            <a:schemeClr val="accent1"/>
+          </a:lnRef>
+          <a:fillRef idx="3">
+            <a:schemeClr val="accent1"/>
+          </a:fillRef>
+          <a:effectRef idx="2">
+            <a:schemeClr val="accent1"/>
+          </a:effectRef>
+          <a:fontRef idx="minor">
+            <a:schemeClr val="lt1"/>
+          </a:fontRef>
+        </p:style>
+        <p:txBody>
+          <a:bodyPr rtlCol="0" anchor="ctr" wrap="square"/>
+          <a:lstStyle/>
+          <a:p>
+            <a:pPr algn="ctr"/>
+            <a:r>
+              <a:rPr sz="900"/>
+              <a:t>Открытые заказы и целевой запас клиента</a:t>
+            </a:r>
+          </a:p>
+        </p:txBody>
+      </p:sp>
+      <p:sp>
+        <p:nvSpPr>
+          <p:cNvPr id="40" name="Rectangle 39"/>
+          <p:cNvSpPr/>
+          <p:nvPr/>
+        </p:nvSpPr>
+        <p:spPr>
+          <a:xfrm>
+            <a:off x="100000" y="4465710"/>
+            <a:ext cx="1600000" cy="620000"/>
+          </a:xfrm>
+          <a:prstGeom prst="rect">
+            <a:avLst/>
+          </a:prstGeom>
+          <a:solidFill>
+            <a:schemeClr val="accent2"/>
+          </a:solidFill>
+        </p:spPr>
+        <p:style>
+          <a:lnRef idx="1">
+            <a:schemeClr val="accent1"/>
+          </a:lnRef>
+          <a:fillRef idx="3">
+            <a:schemeClr val="accent1"/>
+          </a:fillRef>
+          <a:effectRef idx="2">
+            <a:schemeClr val="accent1"/>
+          </a:effectRef>
+          <a:fontRef idx="minor">
+            <a:schemeClr val="lt1"/>
+          </a:fontRef>
+        </p:style>
+        <p:txBody>
+          <a:bodyPr rtlCol="0" anchor="ctr" wrap="square"/>
+          <a:lstStyle/>
+          <a:p>
+            <a:pPr algn="ctr"/>
+            <a:r>
+              <a:rPr sz="900"/>
+              <a:t>Категорийный менеджмент: проверка Building Blocks</a:t>
+            </a:r>
+          </a:p>
+        </p:txBody>
+      </p:sp>
+      <p:sp>
+        <p:nvSpPr>
+          <p:cNvPr id="41" name="Rectangle 40"/>
+          <p:cNvSpPr/>
+          <p:nvPr/>
+        </p:nvSpPr>
+        <p:spPr>
+          <a:xfrm>
+            <a:off x="100000" y="5162852"/>
+            <a:ext cx="1600000" cy="620000"/>
+          </a:xfrm>
+          <a:prstGeom prst="rect">
+            <a:avLst/>
+          </a:prstGeom>
+          <a:solidFill>
+            <a:schemeClr val="accent2"/>
+          </a:solidFill>
+        </p:spPr>
+        <p:style>
+          <a:lnRef idx="1">
+            <a:schemeClr val="accent1"/>
+          </a:lnRef>
+          <a:fillRef idx="3">
+            <a:schemeClr val="accent1"/>
+          </a:fillRef>
+          <a:effectRef idx="2">
+            <a:schemeClr val="accent1"/>
+          </a:effectRef>
+          <a:fontRef idx="minor">
+            <a:schemeClr val="lt1"/>
+          </a:fontRef>
+        </p:style>
+        <p:txBody>
+          <a:bodyPr rtlCol="0" anchor="ctr" wrap="square"/>
+          <a:lstStyle/>
+          <a:p>
+            <a:pPr algn="ctr"/>
+            <a:r>
+              <a:rPr sz="900"/>
+              <a:t>Коммерческие финансы: консенсус-прогноз в деньгах</a:t>
+            </a:r>
+          </a:p>
+        </p:txBody>
+      </p:sp>
+      <p:sp>
+        <p:nvSpPr>
+          <p:cNvPr id="42" name="Rectangle 41"/>
+          <p:cNvSpPr/>
+          <p:nvPr/>
+        </p:nvSpPr>
+        <p:spPr>
+          <a:xfrm>
+            <a:off x="100000" y="5859994"/>
+            <a:ext cx="1600000" cy="620000"/>
+          </a:xfrm>
+          <a:prstGeom prst="rect">
+            <a:avLst/>
+          </a:prstGeom>
+          <a:solidFill>
+            <a:schemeClr val="accent2"/>
+          </a:solidFill>
+        </p:spPr>
+        <p:style>
+          <a:lnRef idx="1">
+            <a:schemeClr val="accent1"/>
+          </a:lnRef>
+          <a:fillRef idx="3">
+            <a:schemeClr val="accent1"/>
+          </a:fillRef>
+          <a:effectRef idx="2">
+            <a:schemeClr val="accent1"/>
+          </a:effectRef>
+          <a:fontRef idx="minor">
+            <a:schemeClr val="lt1"/>
+          </a:fontRef>
+        </p:style>
+        <p:txBody>
+          <a:bodyPr rtlCol="0" anchor="ctr" wrap="square"/>
+          <a:lstStyle/>
+          <a:p>
+            <a:pPr algn="ctr"/>
+            <a:r>
+              <a:rPr sz="900"/>
               <a:t>Получение ограниченного прогноза из модуля SNP</a:t>
             </a:r>
           </a:p>
@@ -4478,7 +4792,7 @@
       </p:sp>
       <p:cxnSp>
         <p:nvCxnSpPr>
-          <p:cNvPr id="36" name="Connector 35"/>
+          <p:cNvPr id="43" name="Connector 42"/>
           <p:cNvCxnSpPr>
             <a:stCxn id="4" idx="3"/>
             <a:endCxn id="8" idx="1"/>
@@ -4488,258 +4802,6 @@
         <p:spPr>
           <a:xfrm>
             <a:off x="3850000" y="1350000"/>
-            <a:ext cx="150000" cy="0"/>
-          </a:xfrm>
-          <a:prstGeom prst="line">
-            <a:avLst/>
-          </a:prstGeom>
-          <a:ln>
-            <a:tailEnd type="triangle"/>
-          </a:ln>
-        </p:spPr>
-        <p:style>
-          <a:lnRef idx="2">
-            <a:schemeClr val="accent1"/>
-          </a:lnRef>
-          <a:fillRef idx="0">
-            <a:schemeClr val="accent1"/>
-          </a:fillRef>
-          <a:effectRef idx="1">
-            <a:schemeClr val="accent1"/>
-          </a:effectRef>
-          <a:fontRef idx="minor">
-            <a:schemeClr val="tx1"/>
-          </a:fontRef>
-        </p:style>
-      </p:cxnSp>
-      <p:cxnSp>
-        <p:nvCxnSpPr>
-          <p:cNvPr id="37" name="Connector 36"/>
-          <p:cNvCxnSpPr>
-            <a:stCxn id="8" idx="2"/>
-            <a:endCxn id="10" idx="0"/>
-          </p:cNvCxnSpPr>
-          <p:nvPr/>
-        </p:nvCxnSpPr>
-        <p:spPr>
-          <a:xfrm>
-            <a:off x="4955000" y="1660000"/>
-            <a:ext cx="0" cy="922000"/>
-          </a:xfrm>
-          <a:prstGeom prst="line">
-            <a:avLst/>
-          </a:prstGeom>
-          <a:ln>
-            <a:tailEnd type="triangle"/>
-          </a:ln>
-        </p:spPr>
-        <p:style>
-          <a:lnRef idx="2">
-            <a:schemeClr val="accent1"/>
-          </a:lnRef>
-          <a:fillRef idx="0">
-            <a:schemeClr val="accent1"/>
-          </a:fillRef>
-          <a:effectRef idx="1">
-            <a:schemeClr val="accent1"/>
-          </a:effectRef>
-          <a:fontRef idx="minor">
-            <a:schemeClr val="tx1"/>
-          </a:fontRef>
-        </p:style>
-      </p:cxnSp>
-      <p:cxnSp>
-        <p:nvCxnSpPr>
-          <p:cNvPr id="38" name="Connector 37"/>
-          <p:cNvCxnSpPr>
-            <a:stCxn id="8" idx="2"/>
-            <a:endCxn id="12" idx="0"/>
-          </p:cNvCxnSpPr>
-          <p:nvPr/>
-        </p:nvCxnSpPr>
-        <p:spPr>
-          <a:xfrm>
-            <a:off x="4955000" y="1660000"/>
-            <a:ext cx="0" cy="2464000"/>
-          </a:xfrm>
-          <a:prstGeom prst="line">
-            <a:avLst/>
-          </a:prstGeom>
-          <a:ln>
-            <a:tailEnd type="triangle"/>
-          </a:ln>
-        </p:spPr>
-        <p:style>
-          <a:lnRef idx="2">
-            <a:schemeClr val="accent1"/>
-          </a:lnRef>
-          <a:fillRef idx="0">
-            <a:schemeClr val="accent1"/>
-          </a:fillRef>
-          <a:effectRef idx="1">
-            <a:schemeClr val="accent1"/>
-          </a:effectRef>
-          <a:fontRef idx="minor">
-            <a:schemeClr val="tx1"/>
-          </a:fontRef>
-        </p:style>
-      </p:cxnSp>
-      <p:cxnSp>
-        <p:nvCxnSpPr>
-          <p:cNvPr id="39" name="Connector 38"/>
-          <p:cNvCxnSpPr>
-            <a:stCxn id="10" idx="2"/>
-            <a:endCxn id="13" idx="0"/>
-          </p:cNvCxnSpPr>
-          <p:nvPr/>
-        </p:nvCxnSpPr>
-        <p:spPr>
-          <a:xfrm>
-            <a:off x="4955000" y="3202000"/>
-            <a:ext cx="0" cy="1692000"/>
-          </a:xfrm>
-          <a:prstGeom prst="line">
-            <a:avLst/>
-          </a:prstGeom>
-          <a:ln>
-            <a:tailEnd type="triangle"/>
-          </a:ln>
-        </p:spPr>
-        <p:style>
-          <a:lnRef idx="2">
-            <a:schemeClr val="accent1"/>
-          </a:lnRef>
-          <a:fillRef idx="0">
-            <a:schemeClr val="accent1"/>
-          </a:fillRef>
-          <a:effectRef idx="1">
-            <a:schemeClr val="accent1"/>
-          </a:effectRef>
-          <a:fontRef idx="minor">
-            <a:schemeClr val="tx1"/>
-          </a:fontRef>
-        </p:style>
-      </p:cxnSp>
-      <p:cxnSp>
-        <p:nvCxnSpPr>
-          <p:cNvPr id="40" name="Connector 39"/>
-          <p:cNvCxnSpPr>
-            <a:stCxn id="12" idx="2"/>
-            <a:endCxn id="13" idx="0"/>
-          </p:cNvCxnSpPr>
-          <p:nvPr/>
-        </p:nvCxnSpPr>
-        <p:spPr>
-          <a:xfrm>
-            <a:off x="4955000" y="4744000"/>
-            <a:ext cx="0" cy="150000"/>
-          </a:xfrm>
-          <a:prstGeom prst="line">
-            <a:avLst/>
-          </a:prstGeom>
-          <a:ln>
-            <a:tailEnd type="triangle"/>
-          </a:ln>
-        </p:spPr>
-        <p:style>
-          <a:lnRef idx="2">
-            <a:schemeClr val="accent1"/>
-          </a:lnRef>
-          <a:fillRef idx="0">
-            <a:schemeClr val="accent1"/>
-          </a:fillRef>
-          <a:effectRef idx="1">
-            <a:schemeClr val="accent1"/>
-          </a:effectRef>
-          <a:fontRef idx="minor">
-            <a:schemeClr val="tx1"/>
-          </a:fontRef>
-        </p:style>
-      </p:cxnSp>
-      <p:cxnSp>
-        <p:nvCxnSpPr>
-          <p:cNvPr id="41" name="Connector 40"/>
-          <p:cNvCxnSpPr>
-            <a:stCxn id="13" idx="0"/>
-            <a:endCxn id="17" idx="2"/>
-          </p:cNvCxnSpPr>
-          <p:nvPr/>
-        </p:nvCxnSpPr>
-        <p:spPr>
-          <a:xfrm flipV="1">
-            <a:off x="4955000" y="1660000"/>
-            <a:ext cx="2060000" cy="3234000"/>
-          </a:xfrm>
-          <a:prstGeom prst="line">
-            <a:avLst/>
-          </a:prstGeom>
-          <a:ln>
-            <a:tailEnd type="triangle"/>
-          </a:ln>
-        </p:spPr>
-        <p:style>
-          <a:lnRef idx="2">
-            <a:schemeClr val="accent1"/>
-          </a:lnRef>
-          <a:fillRef idx="0">
-            <a:schemeClr val="accent1"/>
-          </a:fillRef>
-          <a:effectRef idx="1">
-            <a:schemeClr val="accent1"/>
-          </a:effectRef>
-          <a:fontRef idx="minor">
-            <a:schemeClr val="tx1"/>
-          </a:fontRef>
-        </p:style>
-      </p:cxnSp>
-      <p:cxnSp>
-        <p:nvCxnSpPr>
-          <p:cNvPr id="42" name="Connector 41"/>
-          <p:cNvCxnSpPr>
-            <a:stCxn id="13" idx="0"/>
-            <a:endCxn id="18" idx="2"/>
-          </p:cNvCxnSpPr>
-          <p:nvPr/>
-        </p:nvCxnSpPr>
-        <p:spPr>
-          <a:xfrm flipV="1">
-            <a:off x="4955000" y="2430000"/>
-            <a:ext cx="2060000" cy="2464000"/>
-          </a:xfrm>
-          <a:prstGeom prst="line">
-            <a:avLst/>
-          </a:prstGeom>
-          <a:ln>
-            <a:tailEnd type="triangle"/>
-          </a:ln>
-        </p:spPr>
-        <p:style>
-          <a:lnRef idx="2">
-            <a:schemeClr val="accent1"/>
-          </a:lnRef>
-          <a:fillRef idx="0">
-            <a:schemeClr val="accent1"/>
-          </a:fillRef>
-          <a:effectRef idx="1">
-            <a:schemeClr val="accent1"/>
-          </a:effectRef>
-          <a:fontRef idx="minor">
-            <a:schemeClr val="tx1"/>
-          </a:fontRef>
-        </p:style>
-      </p:cxnSp>
-      <p:cxnSp>
-        <p:nvCxnSpPr>
-          <p:cNvPr id="43" name="Connector 42"/>
-          <p:cNvCxnSpPr>
-            <a:stCxn id="17" idx="3"/>
-            <a:endCxn id="22" idx="1"/>
-          </p:cNvCxnSpPr>
-          <p:nvPr/>
-        </p:nvCxnSpPr>
-        <p:spPr>
-          <a:xfrm>
-            <a:off x="7970000" y="1350000"/>
             <a:ext cx="150000" cy="0"/>
           </a:xfrm>
           <a:prstGeom prst="line">
@@ -4768,15 +4830,15 @@
         <p:nvCxnSpPr>
           <p:cNvPr id="44" name="Connector 43"/>
           <p:cNvCxnSpPr>
-            <a:stCxn id="18" idx="3"/>
-            <a:endCxn id="22" idx="1"/>
+            <a:stCxn id="8" idx="2"/>
+            <a:endCxn id="10" idx="0"/>
           </p:cNvCxnSpPr>
           <p:nvPr/>
         </p:nvCxnSpPr>
         <p:spPr>
-          <a:xfrm flipV="1">
-            <a:off x="7970000" y="1350000"/>
-            <a:ext cx="150000" cy="770000"/>
+          <a:xfrm>
+            <a:off x="4955000" y="1660000"/>
+            <a:ext cx="0" cy="922000"/>
           </a:xfrm>
           <a:prstGeom prst="line">
             <a:avLst/>
@@ -4804,15 +4866,15 @@
         <p:nvCxnSpPr>
           <p:cNvPr id="45" name="Connector 44"/>
           <p:cNvCxnSpPr>
-            <a:stCxn id="22" idx="2"/>
-            <a:endCxn id="24" idx="0"/>
+            <a:stCxn id="8" idx="2"/>
+            <a:endCxn id="12" idx="0"/>
           </p:cNvCxnSpPr>
           <p:nvPr/>
         </p:nvCxnSpPr>
         <p:spPr>
           <a:xfrm>
-            <a:off x="9075000" y="1660000"/>
-            <a:ext cx="0" cy="1090000"/>
+            <a:off x="4955000" y="1660000"/>
+            <a:ext cx="0" cy="2464000"/>
           </a:xfrm>
           <a:prstGeom prst="line">
             <a:avLst/>
@@ -4840,15 +4902,15 @@
         <p:nvCxnSpPr>
           <p:cNvPr id="46" name="Connector 45"/>
           <p:cNvCxnSpPr>
-            <a:stCxn id="24" idx="3"/>
-            <a:endCxn id="28" idx="1"/>
+            <a:stCxn id="10" idx="2"/>
+            <a:endCxn id="13" idx="0"/>
           </p:cNvCxnSpPr>
           <p:nvPr/>
         </p:nvCxnSpPr>
         <p:spPr>
-          <a:xfrm flipV="1">
-            <a:off x="10030000" y="1350000"/>
-            <a:ext cx="150000" cy="1710000"/>
+          <a:xfrm>
+            <a:off x="4955000" y="3202000"/>
+            <a:ext cx="0" cy="1692000"/>
           </a:xfrm>
           <a:prstGeom prst="line">
             <a:avLst/>
@@ -4876,15 +4938,15 @@
         <p:nvCxnSpPr>
           <p:cNvPr id="47" name="Connector 46"/>
           <p:cNvCxnSpPr>
-            <a:stCxn id="31" idx="3"/>
-            <a:endCxn id="4" idx="1"/>
+            <a:stCxn id="12" idx="2"/>
+            <a:endCxn id="13" idx="0"/>
           </p:cNvCxnSpPr>
           <p:nvPr/>
         </p:nvCxnSpPr>
         <p:spPr>
           <a:xfrm>
-            <a:off x="1700000" y="1290000"/>
-            <a:ext cx="240000" cy="60000"/>
+            <a:off x="4955000" y="4744000"/>
+            <a:ext cx="0" cy="150000"/>
           </a:xfrm>
           <a:prstGeom prst="line">
             <a:avLst/>
@@ -4912,17 +4974,17 @@
         <p:nvCxnSpPr>
           <p:cNvPr id="48" name="Connector 47"/>
           <p:cNvCxnSpPr>
-            <a:stCxn id="32" idx="3"/>
-            <a:endCxn id="13" idx="1"/>
+            <a:stCxn id="13" idx="0"/>
+            <a:endCxn id="17" idx="2"/>
           </p:cNvCxnSpPr>
           <p:nvPr/>
         </p:nvCxnSpPr>
         <p:spPr>
-          <a:xfrm>
-            <a:off x="1700000" y="2510000"/>
-            <a:ext cx="2300000" cy="2694000"/>
-          </a:xfrm>
-          <a:prstGeom prst="bentConnector3">
+          <a:xfrm flipV="1">
+            <a:off x="4955000" y="1660000"/>
+            <a:ext cx="2060000" cy="3234000"/>
+          </a:xfrm>
+          <a:prstGeom prst="line">
             <a:avLst/>
           </a:prstGeom>
           <a:ln>
@@ -4948,17 +5010,17 @@
         <p:nvCxnSpPr>
           <p:cNvPr id="49" name="Connector 48"/>
           <p:cNvCxnSpPr>
-            <a:stCxn id="33" idx="3"/>
-            <a:endCxn id="22" idx="1"/>
+            <a:stCxn id="13" idx="0"/>
+            <a:endCxn id="18" idx="2"/>
           </p:cNvCxnSpPr>
           <p:nvPr/>
         </p:nvCxnSpPr>
         <p:spPr>
           <a:xfrm flipV="1">
-            <a:off x="1700000" y="1350000"/>
-            <a:ext cx="6420000" cy="2380000"/>
-          </a:xfrm>
-          <a:prstGeom prst="bentConnector3">
+            <a:off x="4955000" y="2430000"/>
+            <a:ext cx="2060000" cy="2464000"/>
+          </a:xfrm>
+          <a:prstGeom prst="line">
             <a:avLst/>
           </a:prstGeom>
           <a:ln>
@@ -4984,17 +5046,17 @@
         <p:nvCxnSpPr>
           <p:cNvPr id="50" name="Connector 49"/>
           <p:cNvCxnSpPr>
-            <a:stCxn id="34" idx="3"/>
-            <a:endCxn id="24" idx="1"/>
+            <a:stCxn id="17" idx="3"/>
+            <a:endCxn id="22" idx="1"/>
           </p:cNvCxnSpPr>
           <p:nvPr/>
         </p:nvCxnSpPr>
         <p:spPr>
-          <a:xfrm flipV="1">
-            <a:off x="1700000" y="3060000"/>
-            <a:ext cx="6420000" cy="1890000"/>
-          </a:xfrm>
-          <a:prstGeom prst="bentConnector3">
+          <a:xfrm>
+            <a:off x="7970000" y="1350000"/>
+            <a:ext cx="150000" cy="0"/>
+          </a:xfrm>
+          <a:prstGeom prst="line">
             <a:avLst/>
           </a:prstGeom>
           <a:ln>
@@ -5020,17 +5082,17 @@
         <p:nvCxnSpPr>
           <p:cNvPr id="51" name="Connector 50"/>
           <p:cNvCxnSpPr>
-            <a:stCxn id="35" idx="3"/>
-            <a:endCxn id="28" idx="1"/>
+            <a:stCxn id="18" idx="3"/>
+            <a:endCxn id="22" idx="1"/>
           </p:cNvCxnSpPr>
           <p:nvPr/>
         </p:nvCxnSpPr>
         <p:spPr>
           <a:xfrm flipV="1">
-            <a:off x="1700000" y="1350000"/>
-            <a:ext cx="8480000" cy="4820000"/>
-          </a:xfrm>
-          <a:prstGeom prst="bentConnector3">
+            <a:off x="7970000" y="1350000"/>
+            <a:ext cx="150000" cy="770000"/>
+          </a:xfrm>
+          <a:prstGeom prst="line">
             <a:avLst/>
           </a:prstGeom>
           <a:ln>
@@ -5056,6 +5118,78 @@
         <p:nvCxnSpPr>
           <p:cNvPr id="52" name="Connector 51"/>
           <p:cNvCxnSpPr>
+            <a:stCxn id="22" idx="2"/>
+            <a:endCxn id="24" idx="0"/>
+          </p:cNvCxnSpPr>
+          <p:nvPr/>
+        </p:nvCxnSpPr>
+        <p:spPr>
+          <a:xfrm>
+            <a:off x="9075000" y="1660000"/>
+            <a:ext cx="0" cy="1090000"/>
+          </a:xfrm>
+          <a:prstGeom prst="line">
+            <a:avLst/>
+          </a:prstGeom>
+          <a:ln>
+            <a:tailEnd type="triangle"/>
+          </a:ln>
+        </p:spPr>
+        <p:style>
+          <a:lnRef idx="2">
+            <a:schemeClr val="accent1"/>
+          </a:lnRef>
+          <a:fillRef idx="0">
+            <a:schemeClr val="accent1"/>
+          </a:fillRef>
+          <a:effectRef idx="1">
+            <a:schemeClr val="accent1"/>
+          </a:effectRef>
+          <a:fontRef idx="minor">
+            <a:schemeClr val="tx1"/>
+          </a:fontRef>
+        </p:style>
+      </p:cxnSp>
+      <p:cxnSp>
+        <p:nvCxnSpPr>
+          <p:cNvPr id="53" name="Connector 52"/>
+          <p:cNvCxnSpPr>
+            <a:stCxn id="24" idx="3"/>
+            <a:endCxn id="28" idx="1"/>
+          </p:cNvCxnSpPr>
+          <p:nvPr/>
+        </p:nvCxnSpPr>
+        <p:spPr>
+          <a:xfrm flipV="1">
+            <a:off x="10030000" y="1350000"/>
+            <a:ext cx="150000" cy="1710000"/>
+          </a:xfrm>
+          <a:prstGeom prst="line">
+            <a:avLst/>
+          </a:prstGeom>
+          <a:ln>
+            <a:tailEnd type="triangle"/>
+          </a:ln>
+        </p:spPr>
+        <p:style>
+          <a:lnRef idx="2">
+            <a:schemeClr val="accent1"/>
+          </a:lnRef>
+          <a:fillRef idx="0">
+            <a:schemeClr val="accent1"/>
+          </a:fillRef>
+          <a:effectRef idx="1">
+            <a:schemeClr val="accent1"/>
+          </a:effectRef>
+          <a:fontRef idx="minor">
+            <a:schemeClr val="tx1"/>
+          </a:fontRef>
+        </p:style>
+      </p:cxnSp>
+      <p:cxnSp>
+        <p:nvCxnSpPr>
+          <p:cNvPr id="54" name="Connector 53"/>
+          <p:cNvCxnSpPr>
             <a:stCxn id="28" idx="2"/>
             <a:endCxn id="30" idx="0"/>
           </p:cNvCxnSpPr>
@@ -5064,7 +5198,403 @@
         <p:spPr>
           <a:xfrm>
             <a:off x="11135000" y="1660000"/>
-            <a:ext cx="0" cy="922000"/>
+            <a:ext cx="0" cy="754000"/>
+          </a:xfrm>
+          <a:prstGeom prst="line">
+            <a:avLst/>
+          </a:prstGeom>
+          <a:ln>
+            <a:tailEnd type="triangle"/>
+          </a:ln>
+        </p:spPr>
+        <p:style>
+          <a:lnRef idx="2">
+            <a:schemeClr val="accent1"/>
+          </a:lnRef>
+          <a:fillRef idx="0">
+            <a:schemeClr val="accent1"/>
+          </a:fillRef>
+          <a:effectRef idx="1">
+            <a:schemeClr val="accent1"/>
+          </a:effectRef>
+          <a:fontRef idx="minor">
+            <a:schemeClr val="tx1"/>
+          </a:fontRef>
+        </p:style>
+      </p:cxnSp>
+      <p:cxnSp>
+        <p:nvCxnSpPr>
+          <p:cNvPr id="55" name="Connector 54"/>
+          <p:cNvCxnSpPr>
+            <a:stCxn id="28" idx="2"/>
+            <a:endCxn id="32" idx="0"/>
+          </p:cNvCxnSpPr>
+          <p:nvPr/>
+        </p:nvCxnSpPr>
+        <p:spPr>
+          <a:xfrm>
+            <a:off x="11135000" y="1660000"/>
+            <a:ext cx="0" cy="2296000"/>
+          </a:xfrm>
+          <a:prstGeom prst="line">
+            <a:avLst/>
+          </a:prstGeom>
+          <a:ln>
+            <a:tailEnd type="triangle"/>
+          </a:ln>
+        </p:spPr>
+        <p:style>
+          <a:lnRef idx="2">
+            <a:schemeClr val="accent1"/>
+          </a:lnRef>
+          <a:fillRef idx="0">
+            <a:schemeClr val="accent1"/>
+          </a:fillRef>
+          <a:effectRef idx="1">
+            <a:schemeClr val="accent1"/>
+          </a:effectRef>
+          <a:fontRef idx="minor">
+            <a:schemeClr val="tx1"/>
+          </a:fontRef>
+        </p:style>
+      </p:cxnSp>
+      <p:cxnSp>
+        <p:nvCxnSpPr>
+          <p:cNvPr id="56" name="Connector 55"/>
+          <p:cNvCxnSpPr>
+            <a:stCxn id="32" idx="1"/>
+            <a:endCxn id="8" idx="3"/>
+          </p:cNvCxnSpPr>
+          <p:nvPr/>
+        </p:nvCxnSpPr>
+        <p:spPr>
+          <a:xfrm flipH="1" flipV="1">
+            <a:off x="5910000" y="1350000"/>
+            <a:ext cx="4270000" cy="2916000"/>
+          </a:xfrm>
+          <a:prstGeom prst="bentConnector3">
+            <a:avLst/>
+          </a:prstGeom>
+          <a:ln>
+            <a:tailEnd type="triangle"/>
+          </a:ln>
+        </p:spPr>
+        <p:style>
+          <a:lnRef idx="2">
+            <a:schemeClr val="accent1"/>
+          </a:lnRef>
+          <a:fillRef idx="0">
+            <a:schemeClr val="accent1"/>
+          </a:fillRef>
+          <a:effectRef idx="1">
+            <a:schemeClr val="accent1"/>
+          </a:effectRef>
+          <a:fontRef idx="minor">
+            <a:schemeClr val="tx1"/>
+          </a:fontRef>
+        </p:style>
+      </p:cxnSp>
+      <p:cxnSp>
+        <p:nvCxnSpPr>
+          <p:cNvPr id="57" name="Connector 56"/>
+          <p:cNvCxnSpPr>
+            <a:stCxn id="35" idx="3"/>
+            <a:endCxn id="4" idx="1"/>
+          </p:cNvCxnSpPr>
+          <p:nvPr/>
+        </p:nvCxnSpPr>
+        <p:spPr>
+          <a:xfrm>
+            <a:off x="1700000" y="1290000"/>
+            <a:ext cx="240000" cy="60000"/>
+          </a:xfrm>
+          <a:prstGeom prst="line">
+            <a:avLst/>
+          </a:prstGeom>
+          <a:ln>
+            <a:tailEnd type="triangle"/>
+          </a:ln>
+        </p:spPr>
+        <p:style>
+          <a:lnRef idx="2">
+            <a:schemeClr val="accent1"/>
+          </a:lnRef>
+          <a:fillRef idx="0">
+            <a:schemeClr val="accent1"/>
+          </a:fillRef>
+          <a:effectRef idx="1">
+            <a:schemeClr val="accent1"/>
+          </a:effectRef>
+          <a:fontRef idx="minor">
+            <a:schemeClr val="tx1"/>
+          </a:fontRef>
+        </p:style>
+      </p:cxnSp>
+      <p:cxnSp>
+        <p:nvCxnSpPr>
+          <p:cNvPr id="58" name="Connector 57"/>
+          <p:cNvCxnSpPr>
+            <a:stCxn id="36" idx="3"/>
+            <a:endCxn id="4" idx="1"/>
+          </p:cNvCxnSpPr>
+          <p:nvPr/>
+        </p:nvCxnSpPr>
+        <p:spPr>
+          <a:xfrm flipV="1">
+            <a:off x="1700000" y="1350000"/>
+            <a:ext cx="240000" cy="637142"/>
+          </a:xfrm>
+          <a:prstGeom prst="line">
+            <a:avLst/>
+          </a:prstGeom>
+          <a:ln>
+            <a:tailEnd type="triangle"/>
+          </a:ln>
+        </p:spPr>
+        <p:style>
+          <a:lnRef idx="2">
+            <a:schemeClr val="accent1"/>
+          </a:lnRef>
+          <a:fillRef idx="0">
+            <a:schemeClr val="accent1"/>
+          </a:fillRef>
+          <a:effectRef idx="1">
+            <a:schemeClr val="accent1"/>
+          </a:effectRef>
+          <a:fontRef idx="minor">
+            <a:schemeClr val="tx1"/>
+          </a:fontRef>
+        </p:style>
+      </p:cxnSp>
+      <p:cxnSp>
+        <p:nvCxnSpPr>
+          <p:cNvPr id="59" name="Connector 58"/>
+          <p:cNvCxnSpPr>
+            <a:stCxn id="37" idx="3"/>
+            <a:endCxn id="13" idx="1"/>
+          </p:cNvCxnSpPr>
+          <p:nvPr/>
+        </p:nvCxnSpPr>
+        <p:spPr>
+          <a:xfrm>
+            <a:off x="1700000" y="2684284"/>
+            <a:ext cx="2300000" cy="2519716"/>
+          </a:xfrm>
+          <a:prstGeom prst="bentConnector3">
+            <a:avLst/>
+          </a:prstGeom>
+          <a:ln>
+            <a:tailEnd type="triangle"/>
+          </a:ln>
+        </p:spPr>
+        <p:style>
+          <a:lnRef idx="2">
+            <a:schemeClr val="accent1"/>
+          </a:lnRef>
+          <a:fillRef idx="0">
+            <a:schemeClr val="accent1"/>
+          </a:fillRef>
+          <a:effectRef idx="1">
+            <a:schemeClr val="accent1"/>
+          </a:effectRef>
+          <a:fontRef idx="minor">
+            <a:schemeClr val="tx1"/>
+          </a:fontRef>
+        </p:style>
+      </p:cxnSp>
+      <p:cxnSp>
+        <p:nvCxnSpPr>
+          <p:cNvPr id="60" name="Connector 59"/>
+          <p:cNvCxnSpPr>
+            <a:stCxn id="38" idx="3"/>
+            <a:endCxn id="18" idx="1"/>
+          </p:cNvCxnSpPr>
+          <p:nvPr/>
+        </p:nvCxnSpPr>
+        <p:spPr>
+          <a:xfrm flipV="1">
+            <a:off x="1700000" y="2120000"/>
+            <a:ext cx="4360000" cy="1261426"/>
+          </a:xfrm>
+          <a:prstGeom prst="bentConnector3">
+            <a:avLst/>
+          </a:prstGeom>
+          <a:ln>
+            <a:tailEnd type="triangle"/>
+          </a:ln>
+        </p:spPr>
+        <p:style>
+          <a:lnRef idx="2">
+            <a:schemeClr val="accent1"/>
+          </a:lnRef>
+          <a:fillRef idx="0">
+            <a:schemeClr val="accent1"/>
+          </a:fillRef>
+          <a:effectRef idx="1">
+            <a:schemeClr val="accent1"/>
+          </a:effectRef>
+          <a:fontRef idx="minor">
+            <a:schemeClr val="tx1"/>
+          </a:fontRef>
+        </p:style>
+      </p:cxnSp>
+      <p:cxnSp>
+        <p:nvCxnSpPr>
+          <p:cNvPr id="61" name="Connector 60"/>
+          <p:cNvCxnSpPr>
+            <a:stCxn id="39" idx="3"/>
+            <a:endCxn id="18" idx="1"/>
+          </p:cNvCxnSpPr>
+          <p:nvPr/>
+        </p:nvCxnSpPr>
+        <p:spPr>
+          <a:xfrm flipV="1">
+            <a:off x="1700000" y="2120000"/>
+            <a:ext cx="4360000" cy="1958568"/>
+          </a:xfrm>
+          <a:prstGeom prst="bentConnector3">
+            <a:avLst/>
+          </a:prstGeom>
+          <a:ln>
+            <a:tailEnd type="triangle"/>
+          </a:ln>
+        </p:spPr>
+        <p:style>
+          <a:lnRef idx="2">
+            <a:schemeClr val="accent1"/>
+          </a:lnRef>
+          <a:fillRef idx="0">
+            <a:schemeClr val="accent1"/>
+          </a:fillRef>
+          <a:effectRef idx="1">
+            <a:schemeClr val="accent1"/>
+          </a:effectRef>
+          <a:fontRef idx="minor">
+            <a:schemeClr val="tx1"/>
+          </a:fontRef>
+        </p:style>
+      </p:cxnSp>
+      <p:cxnSp>
+        <p:nvCxnSpPr>
+          <p:cNvPr id="62" name="Connector 61"/>
+          <p:cNvCxnSpPr>
+            <a:stCxn id="40" idx="3"/>
+            <a:endCxn id="22" idx="1"/>
+          </p:cNvCxnSpPr>
+          <p:nvPr/>
+        </p:nvCxnSpPr>
+        <p:spPr>
+          <a:xfrm flipV="1">
+            <a:off x="1700000" y="1350000"/>
+            <a:ext cx="6420000" cy="3425710"/>
+          </a:xfrm>
+          <a:prstGeom prst="bentConnector3">
+            <a:avLst/>
+          </a:prstGeom>
+          <a:ln>
+            <a:tailEnd type="triangle"/>
+          </a:ln>
+        </p:spPr>
+        <p:style>
+          <a:lnRef idx="2">
+            <a:schemeClr val="accent1"/>
+          </a:lnRef>
+          <a:fillRef idx="0">
+            <a:schemeClr val="accent1"/>
+          </a:fillRef>
+          <a:effectRef idx="1">
+            <a:schemeClr val="accent1"/>
+          </a:effectRef>
+          <a:fontRef idx="minor">
+            <a:schemeClr val="tx1"/>
+          </a:fontRef>
+        </p:style>
+      </p:cxnSp>
+      <p:cxnSp>
+        <p:nvCxnSpPr>
+          <p:cNvPr id="63" name="Connector 62"/>
+          <p:cNvCxnSpPr>
+            <a:stCxn id="41" idx="3"/>
+            <a:endCxn id="24" idx="1"/>
+          </p:cNvCxnSpPr>
+          <p:nvPr/>
+        </p:nvCxnSpPr>
+        <p:spPr>
+          <a:xfrm flipV="1">
+            <a:off x="1700000" y="3060000"/>
+            <a:ext cx="6420000" cy="2412852"/>
+          </a:xfrm>
+          <a:prstGeom prst="bentConnector3">
+            <a:avLst/>
+          </a:prstGeom>
+          <a:ln>
+            <a:tailEnd type="triangle"/>
+          </a:ln>
+        </p:spPr>
+        <p:style>
+          <a:lnRef idx="2">
+            <a:schemeClr val="accent1"/>
+          </a:lnRef>
+          <a:fillRef idx="0">
+            <a:schemeClr val="accent1"/>
+          </a:fillRef>
+          <a:effectRef idx="1">
+            <a:schemeClr val="accent1"/>
+          </a:effectRef>
+          <a:fontRef idx="minor">
+            <a:schemeClr val="tx1"/>
+          </a:fontRef>
+        </p:style>
+      </p:cxnSp>
+      <p:cxnSp>
+        <p:nvCxnSpPr>
+          <p:cNvPr id="64" name="Connector 63"/>
+          <p:cNvCxnSpPr>
+            <a:stCxn id="42" idx="3"/>
+            <a:endCxn id="30" idx="1"/>
+          </p:cNvCxnSpPr>
+          <p:nvPr/>
+        </p:nvCxnSpPr>
+        <p:spPr>
+          <a:xfrm flipV="1">
+            <a:off x="1700000" y="2724000"/>
+            <a:ext cx="8480000" cy="3445994"/>
+          </a:xfrm>
+          <a:prstGeom prst="bentConnector3">
+            <a:avLst/>
+          </a:prstGeom>
+          <a:ln>
+            <a:tailEnd type="triangle"/>
+          </a:ln>
+        </p:spPr>
+        <p:style>
+          <a:lnRef idx="2">
+            <a:schemeClr val="accent1"/>
+          </a:lnRef>
+          <a:fillRef idx="0">
+            <a:schemeClr val="accent1"/>
+          </a:fillRef>
+          <a:effectRef idx="1">
+            <a:schemeClr val="accent1"/>
+          </a:effectRef>
+          <a:fontRef idx="minor">
+            <a:schemeClr val="tx1"/>
+          </a:fontRef>
+        </p:style>
+      </p:cxnSp>
+      <p:cxnSp>
+        <p:nvCxnSpPr>
+          <p:cNvPr id="65" name="Connector 64"/>
+          <p:cNvCxnSpPr>
+            <a:stCxn id="28" idx="2"/>
+            <a:endCxn id="34" idx="0"/>
+          </p:cNvCxnSpPr>
+          <p:nvPr/>
+        </p:nvCxnSpPr>
+        <p:spPr>
+          <a:xfrm>
+            <a:off x="11135000" y="1660000"/>
+            <a:ext cx="0" cy="4174000"/>
           </a:xfrm>
           <a:prstGeom prst="line">
             <a:avLst/>

--- a/In.Plan DP process 06-09-2026.pptx
+++ b/In.Plan DP process 06-09-2026.pptx
@@ -3197,7 +3197,7 @@
             <a:pPr algn="ctr"/>
             <a:r>
               <a:rPr sz="1000"/>
-              <a:t>Подготовка сопоставимой истории</a:t>
+              <a:t>Проверка качества данных</a:t>
             </a:r>
           </a:p>
         </p:txBody>
@@ -3211,7 +3211,7 @@
         <p:spPr>
           <a:xfrm>
             <a:off x="1940000" y="1760000"/>
-            <a:ext cx="1910000" cy="1008000"/>
+            <a:ext cx="1910000" cy="1176000"/>
           </a:xfrm>
           <a:prstGeom prst="rect">
             <a:avLst/>
@@ -3226,53 +3226,46 @@
           <a:p>
             <a:r>
               <a:rPr sz="900" b="0"/>
-              <a:t>OOS, выбросы, промо, ML-очистка</a:t>
+              <a:t>Полнота истории и пропуски</a:t>
             </a:r>
           </a:p>
           <a:p>
             <a:r>
               <a:rPr sz="900" b="0"/>
-              <a:t>Перенос истории при смене схемы</a:t>
+              <a:t>Новые и изменённые DFU, маппинг SKU</a:t>
             </a:r>
           </a:p>
           <a:p>
             <a:r>
               <a:rPr sz="900" b="0"/>
-              <a:t>Замена SKU через DFU</a:t>
+              <a:t>Единицы измерения, дубли, отрицательные значения</a:t>
             </a:r>
           </a:p>
           <a:p>
             <a:r>
               <a:rPr sz="900" b="0"/>
-              <a:t>Исключения планеру</a:t>
-            </a:r>
-          </a:p>
-          <a:p>
-            <a:r>
-              <a:rPr sz="900" b="0"/>
-              <a:t>Разделение потоков: рынок / внутренний передел / экспорт</a:t>
-            </a:r>
-          </a:p>
-        </p:txBody>
-      </p:sp>
-      <p:sp>
-        <p:nvSpPr>
-          <p:cNvPr id="6" name="Rectangle 5"/>
+              <a:t>Блокировка запуска расчёта при отказе</a:t>
+            </a:r>
+          </a:p>
+        </p:txBody>
+      </p:sp>
+      <p:sp>
+        <p:nvSpPr>
+          <p:cNvPr id="6" name="Rounded Rectangle 5"/>
           <p:cNvSpPr/>
           <p:nvPr/>
         </p:nvSpPr>
         <p:spPr>
           <a:xfrm>
-            <a:off x="3940000" y="980000"/>
-            <a:ext cx="2030000" cy="5500000"/>
-          </a:xfrm>
-          <a:prstGeom prst="rect">
-            <a:avLst/>
-          </a:prstGeom>
-          <a:noFill/>
-          <a:ln>
-            <a:noFill/>
-          </a:ln>
+            <a:off x="1940000" y="3086000"/>
+            <a:ext cx="1910000" cy="620000"/>
+          </a:xfrm>
+          <a:prstGeom prst="roundRect">
+            <a:avLst/>
+          </a:prstGeom>
+          <a:solidFill>
+            <a:schemeClr val="accent1"/>
+          </a:solidFill>
         </p:spPr>
         <p:style>
           <a:lnRef idx="1">
@@ -3293,6 +3286,10 @@
           <a:lstStyle/>
           <a:p>
             <a:pPr algn="ctr"/>
+            <a:r>
+              <a:rPr sz="1000"/>
+              <a:t>Подготовка сопоставимой истории</a:t>
+            </a:r>
           </a:p>
         </p:txBody>
       </p:sp>
@@ -3304,8 +3301,8 @@
         </p:nvSpPr>
         <p:spPr>
           <a:xfrm>
-            <a:off x="3940000" y="500000"/>
-            <a:ext cx="2030000" cy="380000"/>
+            <a:off x="1940000" y="3806000"/>
+            <a:ext cx="1910000" cy="1008000"/>
           </a:xfrm>
           <a:prstGeom prst="rect">
             <a:avLst/>
@@ -3319,29 +3316,54 @@
           <a:lstStyle/>
           <a:p>
             <a:r>
-              <a:rPr sz="1100" b="1"/>
-              <a:t>Расчёт прогноза</a:t>
-            </a:r>
-          </a:p>
-        </p:txBody>
-      </p:sp>
-      <p:sp>
-        <p:nvSpPr>
-          <p:cNvPr id="8" name="Rounded Rectangle 7"/>
+              <a:rPr sz="900" b="0"/>
+              <a:t>OOS, выбросы, промо, ML-очистка</a:t>
+            </a:r>
+          </a:p>
+          <a:p>
+            <a:r>
+              <a:rPr sz="900" b="0"/>
+              <a:t>Перенос истории при смене схемы</a:t>
+            </a:r>
+          </a:p>
+          <a:p>
+            <a:r>
+              <a:rPr sz="900" b="0"/>
+              <a:t>Замена SKU через DFU</a:t>
+            </a:r>
+          </a:p>
+          <a:p>
+            <a:r>
+              <a:rPr sz="900" b="0"/>
+              <a:t>Исключения планеру</a:t>
+            </a:r>
+          </a:p>
+          <a:p>
+            <a:r>
+              <a:rPr sz="900" b="0"/>
+              <a:t>Разделение потоков: рынок / внутренний передел / экспорт</a:t>
+            </a:r>
+          </a:p>
+        </p:txBody>
+      </p:sp>
+      <p:sp>
+        <p:nvSpPr>
+          <p:cNvPr id="8" name="Rectangle 7"/>
           <p:cNvSpPr/>
           <p:nvPr/>
         </p:nvSpPr>
         <p:spPr>
           <a:xfrm>
-            <a:off x="4000000" y="1040000"/>
-            <a:ext cx="1910000" cy="620000"/>
-          </a:xfrm>
-          <a:prstGeom prst="roundRect">
-            <a:avLst/>
-          </a:prstGeom>
-          <a:solidFill>
-            <a:schemeClr val="accent1"/>
-          </a:solidFill>
+            <a:off x="3940000" y="980000"/>
+            <a:ext cx="2030000" cy="5500000"/>
+          </a:xfrm>
+          <a:prstGeom prst="rect">
+            <a:avLst/>
+          </a:prstGeom>
+          <a:noFill/>
+          <a:ln>
+            <a:noFill/>
+          </a:ln>
         </p:spPr>
         <p:style>
           <a:lnRef idx="1">
@@ -3362,10 +3384,6 @@
           <a:lstStyle/>
           <a:p>
             <a:pPr algn="ctr"/>
-            <a:r>
-              <a:rPr sz="1000"/>
-              <a:t>Сегментация/кластеризация и настройка методов</a:t>
-            </a:r>
           </a:p>
         </p:txBody>
       </p:sp>
@@ -3377,8 +3395,8 @@
         </p:nvSpPr>
         <p:spPr>
           <a:xfrm>
-            <a:off x="4000000" y="1760000"/>
-            <a:ext cx="1910000" cy="672000"/>
+            <a:off x="3940000" y="500000"/>
+            <a:ext cx="2030000" cy="380000"/>
           </a:xfrm>
           <a:prstGeom prst="rect">
             <a:avLst/>
@@ -3392,20 +3410,8 @@
           <a:lstStyle/>
           <a:p>
             <a:r>
-              <a:rPr sz="900" b="0"/>
-              <a:t>ABC/XYZ, непрерывность, тренд</a:t>
-            </a:r>
-          </a:p>
-          <a:p>
-            <a:r>
-              <a:rPr sz="900" b="0"/>
-              <a:t>ML-кластеризация, сезонность</a:t>
-            </a:r>
-          </a:p>
-          <a:p>
-            <a:r>
-              <a:rPr sz="900" b="0"/>
-              <a:t>Привязка методов и параметров к сегменту</a:t>
+              <a:rPr sz="1100" b="1"/>
+              <a:t>Расчёт прогноза</a:t>
             </a:r>
           </a:p>
         </p:txBody>
@@ -3418,7 +3424,7 @@
         </p:nvSpPr>
         <p:spPr>
           <a:xfrm>
-            <a:off x="4000000" y="2582000"/>
+            <a:off x="4000000" y="1040000"/>
             <a:ext cx="1910000" cy="620000"/>
           </a:xfrm>
           <a:prstGeom prst="roundRect">
@@ -3449,7 +3455,7 @@
             <a:pPr algn="ctr"/>
             <a:r>
               <a:rPr sz="1000"/>
-              <a:t>Ассортимент: методы и чемпион</a:t>
+              <a:t>Сегментация/кластеризация и настройка методов</a:t>
             </a:r>
           </a:p>
         </p:txBody>
@@ -3462,7 +3468,7 @@
         </p:nvSpPr>
         <p:spPr>
           <a:xfrm>
-            <a:off x="4000000" y="3302000"/>
+            <a:off x="4000000" y="1760000"/>
             <a:ext cx="1910000" cy="672000"/>
           </a:xfrm>
           <a:prstGeom prst="rect">
@@ -3478,19 +3484,19 @@
           <a:p>
             <a:r>
               <a:rPr sz="900" b="0"/>
-              <a:t>Статистика, ансамбли, ML</a:t>
+              <a:t>ABC/XYZ, непрерывность, тренд</a:t>
             </a:r>
           </a:p>
           <a:p>
             <a:r>
               <a:rPr sz="900" b="0"/>
-              <a:t>Backtest, чемпион для серии</a:t>
+              <a:t>ML-кластеризация, сезонность</a:t>
             </a:r>
           </a:p>
           <a:p>
             <a:r>
               <a:rPr sz="900" b="0"/>
-              <a:t>Референс, коэффициент, даты действия</a:t>
+              <a:t>Привязка методов и параметров к сегменту</a:t>
             </a:r>
           </a:p>
         </p:txBody>
@@ -3503,7 +3509,7 @@
         </p:nvSpPr>
         <p:spPr>
           <a:xfrm>
-            <a:off x="4000000" y="4124000"/>
+            <a:off x="4000000" y="2582000"/>
             <a:ext cx="1910000" cy="620000"/>
           </a:xfrm>
           <a:prstGeom prst="roundRect">
@@ -3534,20 +3540,61 @@
             <a:pPr algn="ctr"/>
             <a:r>
               <a:rPr sz="1000"/>
-              <a:t>Новинки: похожие товары</a:t>
-            </a:r>
-          </a:p>
-        </p:txBody>
-      </p:sp>
-      <p:sp>
-        <p:nvSpPr>
-          <p:cNvPr id="13" name="Rounded Rectangle 12"/>
+              <a:t>Ассортимент: методы и чемпион</a:t>
+            </a:r>
+          </a:p>
+        </p:txBody>
+      </p:sp>
+      <p:sp>
+        <p:nvSpPr>
+          <p:cNvPr id="13" name="TextBox 12"/>
+          <p:cNvSpPr txBox="1"/>
+          <p:nvPr/>
+        </p:nvSpPr>
+        <p:spPr>
+          <a:xfrm>
+            <a:off x="4000000" y="3302000"/>
+            <a:ext cx="1910000" cy="672000"/>
+          </a:xfrm>
+          <a:prstGeom prst="rect">
+            <a:avLst/>
+          </a:prstGeom>
+          <a:noFill/>
+        </p:spPr>
+        <p:txBody>
+          <a:bodyPr wrap="square">
+            <a:spAutoFit/>
+          </a:bodyPr>
+          <a:lstStyle/>
+          <a:p>
+            <a:r>
+              <a:rPr sz="900" b="0"/>
+              <a:t>Статистика, ансамбли, ML</a:t>
+            </a:r>
+          </a:p>
+          <a:p>
+            <a:r>
+              <a:rPr sz="900" b="0"/>
+              <a:t>Backtest, чемпион для серии</a:t>
+            </a:r>
+          </a:p>
+          <a:p>
+            <a:r>
+              <a:rPr sz="900" b="0"/>
+              <a:t>Референс, коэффициент, даты действия</a:t>
+            </a:r>
+          </a:p>
+        </p:txBody>
+      </p:sp>
+      <p:sp>
+        <p:nvSpPr>
+          <p:cNvPr id="14" name="Rounded Rectangle 13"/>
           <p:cNvSpPr/>
           <p:nvPr/>
         </p:nvSpPr>
         <p:spPr>
           <a:xfrm>
-            <a:off x="4000000" y="4894000"/>
+            <a:off x="4000000" y="4124000"/>
             <a:ext cx="1910000" cy="620000"/>
           </a:xfrm>
           <a:prstGeom prst="roundRect">
@@ -3578,70 +3625,28 @@
             <a:pPr algn="ctr"/>
             <a:r>
               <a:rPr sz="1000"/>
-              <a:t>Промо light: прогноз промо-объёмов (опционально)</a:t>
-            </a:r>
-          </a:p>
-        </p:txBody>
-      </p:sp>
-      <p:sp>
-        <p:nvSpPr>
-          <p:cNvPr id="14" name="TextBox 13"/>
-          <p:cNvSpPr txBox="1"/>
-          <p:nvPr/>
-        </p:nvSpPr>
-        <p:spPr>
-          <a:xfrm>
-            <a:off x="4000000" y="5614000"/>
-            <a:ext cx="1910000" cy="672000"/>
-          </a:xfrm>
-          <a:prstGeom prst="rect">
-            <a:avLst/>
-          </a:prstGeom>
-          <a:noFill/>
-        </p:spPr>
-        <p:txBody>
-          <a:bodyPr wrap="square">
-            <a:spAutoFit/>
-          </a:bodyPr>
-          <a:lstStyle/>
-          <a:p>
-            <a:r>
-              <a:rPr sz="900" b="0"/>
-              <a:t>Календарь акций и механик</a:t>
-            </a:r>
-          </a:p>
-          <a:p>
-            <a:r>
-              <a:rPr sz="900" b="0"/>
-              <a:t>Промо-объёмы по промо-эффектам из истории</a:t>
-            </a:r>
-          </a:p>
-          <a:p>
-            <a:r>
-              <a:rPr sz="900" b="0"/>
-              <a:t>Промо-план из TPM/NRM</a:t>
-            </a:r>
-          </a:p>
-        </p:txBody>
-      </p:sp>
-      <p:sp>
-        <p:nvSpPr>
-          <p:cNvPr id="15" name="Rectangle 14"/>
+              <a:t>Новинки: похожие товары</a:t>
+            </a:r>
+          </a:p>
+        </p:txBody>
+      </p:sp>
+      <p:sp>
+        <p:nvSpPr>
+          <p:cNvPr id="15" name="Rounded Rectangle 14"/>
           <p:cNvSpPr/>
           <p:nvPr/>
         </p:nvSpPr>
         <p:spPr>
           <a:xfrm>
-            <a:off x="6000000" y="980000"/>
-            <a:ext cx="2030000" cy="5500000"/>
-          </a:xfrm>
-          <a:prstGeom prst="rect">
-            <a:avLst/>
-          </a:prstGeom>
-          <a:noFill/>
-          <a:ln>
-            <a:noFill/>
-          </a:ln>
+            <a:off x="4000000" y="4894000"/>
+            <a:ext cx="1910000" cy="620000"/>
+          </a:xfrm>
+          <a:prstGeom prst="roundRect">
+            <a:avLst/>
+          </a:prstGeom>
+          <a:solidFill>
+            <a:schemeClr val="accent1"/>
+          </a:solidFill>
         </p:spPr>
         <p:style>
           <a:lnRef idx="1">
@@ -3662,6 +3667,10 @@
           <a:lstStyle/>
           <a:p>
             <a:pPr algn="ctr"/>
+            <a:r>
+              <a:rPr sz="1000"/>
+              <a:t>Промо light: прогноз промо-объёмов (опционально)</a:t>
+            </a:r>
           </a:p>
         </p:txBody>
       </p:sp>
@@ -3673,8 +3682,8 @@
         </p:nvSpPr>
         <p:spPr>
           <a:xfrm>
-            <a:off x="6000000" y="500000"/>
-            <a:ext cx="2030000" cy="380000"/>
+            <a:off x="4000000" y="5614000"/>
+            <a:ext cx="1910000" cy="672000"/>
           </a:xfrm>
           <a:prstGeom prst="rect">
             <a:avLst/>
@@ -3688,29 +3697,42 @@
           <a:lstStyle/>
           <a:p>
             <a:r>
-              <a:rPr sz="1100" b="1"/>
-              <a:t>Sell-In по модели канала</a:t>
-            </a:r>
-          </a:p>
-        </p:txBody>
-      </p:sp>
-      <p:sp>
-        <p:nvSpPr>
-          <p:cNvPr id="17" name="Rounded Rectangle 16"/>
+              <a:rPr sz="900" b="0"/>
+              <a:t>Календарь акций и механик</a:t>
+            </a:r>
+          </a:p>
+          <a:p>
+            <a:r>
+              <a:rPr sz="900" b="0"/>
+              <a:t>Промо-объёмы по промо-эффектам из истории</a:t>
+            </a:r>
+          </a:p>
+          <a:p>
+            <a:r>
+              <a:rPr sz="900" b="0"/>
+              <a:t>Промо-план из TPM/NRM</a:t>
+            </a:r>
+          </a:p>
+        </p:txBody>
+      </p:sp>
+      <p:sp>
+        <p:nvSpPr>
+          <p:cNvPr id="17" name="Rectangle 16"/>
           <p:cNvSpPr/>
           <p:nvPr/>
         </p:nvSpPr>
         <p:spPr>
           <a:xfrm>
-            <a:off x="6060000" y="1040000"/>
-            <a:ext cx="1910000" cy="620000"/>
-          </a:xfrm>
-          <a:prstGeom prst="roundRect">
-            <a:avLst/>
-          </a:prstGeom>
-          <a:solidFill>
-            <a:schemeClr val="accent1"/>
-          </a:solidFill>
+            <a:off x="6000000" y="980000"/>
+            <a:ext cx="2030000" cy="5500000"/>
+          </a:xfrm>
+          <a:prstGeom prst="rect">
+            <a:avLst/>
+          </a:prstGeom>
+          <a:noFill/>
+          <a:ln>
+            <a:noFill/>
+          </a:ln>
         </p:spPr>
         <p:style>
           <a:lnRef idx="1">
@@ -3731,22 +3753,47 @@
           <a:lstStyle/>
           <a:p>
             <a:pPr algn="ctr"/>
-            <a:r>
-              <a:rPr sz="1000"/>
-              <a:t>Прямые каналы: прямой прогноз Sell-In</a:t>
-            </a:r>
-          </a:p>
-        </p:txBody>
-      </p:sp>
-      <p:sp>
-        <p:nvSpPr>
-          <p:cNvPr id="18" name="Rounded Rectangle 17"/>
+          </a:p>
+        </p:txBody>
+      </p:sp>
+      <p:sp>
+        <p:nvSpPr>
+          <p:cNvPr id="18" name="TextBox 17"/>
+          <p:cNvSpPr txBox="1"/>
+          <p:nvPr/>
+        </p:nvSpPr>
+        <p:spPr>
+          <a:xfrm>
+            <a:off x="6000000" y="500000"/>
+            <a:ext cx="2030000" cy="380000"/>
+          </a:xfrm>
+          <a:prstGeom prst="rect">
+            <a:avLst/>
+          </a:prstGeom>
+          <a:noFill/>
+        </p:spPr>
+        <p:txBody>
+          <a:bodyPr wrap="square">
+            <a:spAutoFit/>
+          </a:bodyPr>
+          <a:lstStyle/>
+          <a:p>
+            <a:r>
+              <a:rPr sz="1100" b="1"/>
+              <a:t>Sell-In по модели канала</a:t>
+            </a:r>
+          </a:p>
+        </p:txBody>
+      </p:sp>
+      <p:sp>
+        <p:nvSpPr>
+          <p:cNvPr id="19" name="Rounded Rectangle 18"/>
           <p:cNvSpPr/>
           <p:nvPr/>
         </p:nvSpPr>
         <p:spPr>
           <a:xfrm>
-            <a:off x="6060000" y="1810000"/>
+            <a:off x="6060000" y="1040000"/>
             <a:ext cx="1910000" cy="620000"/>
           </a:xfrm>
           <a:prstGeom prst="roundRect">
@@ -3777,64 +3824,28 @@
             <a:pPr algn="ctr"/>
             <a:r>
               <a:rPr sz="1000"/>
-              <a:t>Sell-Out → баланс → Sell-In</a:t>
-            </a:r>
-          </a:p>
-        </p:txBody>
-      </p:sp>
-      <p:sp>
-        <p:nvSpPr>
-          <p:cNvPr id="19" name="TextBox 18"/>
-          <p:cNvSpPr txBox="1"/>
-          <p:nvPr/>
-        </p:nvSpPr>
-        <p:spPr>
-          <a:xfrm>
-            <a:off x="6060000" y="2530000"/>
-            <a:ext cx="1910000" cy="672000"/>
-          </a:xfrm>
-          <a:prstGeom prst="rect">
-            <a:avLst/>
-          </a:prstGeom>
-          <a:noFill/>
-        </p:spPr>
-        <p:txBody>
-          <a:bodyPr wrap="square">
-            <a:spAutoFit/>
-          </a:bodyPr>
-          <a:lstStyle/>
-          <a:p>
-            <a:r>
-              <a:rPr sz="900" b="0"/>
-              <a:t>Остатки, транзит, открытые заказы, целевой запас</a:t>
-            </a:r>
-          </a:p>
-          <a:p>
-            <a:r>
-              <a:rPr sz="900" b="0"/>
-              <a:t>Прогнозный остаток и дни покрытия</a:t>
-            </a:r>
-          </a:p>
-        </p:txBody>
-      </p:sp>
-      <p:sp>
-        <p:nvSpPr>
-          <p:cNvPr id="20" name="Rectangle 19"/>
+              <a:t>Прямые каналы: прямой прогноз Sell-In</a:t>
+            </a:r>
+          </a:p>
+        </p:txBody>
+      </p:sp>
+      <p:sp>
+        <p:nvSpPr>
+          <p:cNvPr id="20" name="Rounded Rectangle 19"/>
           <p:cNvSpPr/>
           <p:nvPr/>
         </p:nvSpPr>
         <p:spPr>
           <a:xfrm>
-            <a:off x="8060000" y="980000"/>
-            <a:ext cx="2030000" cy="5500000"/>
-          </a:xfrm>
-          <a:prstGeom prst="rect">
-            <a:avLst/>
-          </a:prstGeom>
-          <a:noFill/>
-          <a:ln>
-            <a:noFill/>
-          </a:ln>
+            <a:off x="6060000" y="1810000"/>
+            <a:ext cx="1910000" cy="620000"/>
+          </a:xfrm>
+          <a:prstGeom prst="roundRect">
+            <a:avLst/>
+          </a:prstGeom>
+          <a:solidFill>
+            <a:schemeClr val="accent1"/>
+          </a:solidFill>
         </p:spPr>
         <p:style>
           <a:lnRef idx="1">
@@ -3855,6 +3866,10 @@
           <a:lstStyle/>
           <a:p>
             <a:pPr algn="ctr"/>
+            <a:r>
+              <a:rPr sz="1000"/>
+              <a:t>Sell-Out → баланс → Sell-In</a:t>
+            </a:r>
           </a:p>
         </p:txBody>
       </p:sp>
@@ -3866,8 +3881,8 @@
         </p:nvSpPr>
         <p:spPr>
           <a:xfrm>
-            <a:off x="8060000" y="500000"/>
-            <a:ext cx="2030000" cy="380000"/>
+            <a:off x="6060000" y="2530000"/>
+            <a:ext cx="1910000" cy="672000"/>
           </a:xfrm>
           <a:prstGeom prst="rect">
             <a:avLst/>
@@ -3881,29 +3896,36 @@
           <a:lstStyle/>
           <a:p>
             <a:r>
-              <a:rPr sz="1100" b="1"/>
-              <a:t>Обогащение и согласование</a:t>
-            </a:r>
-          </a:p>
-        </p:txBody>
-      </p:sp>
-      <p:sp>
-        <p:nvSpPr>
-          <p:cNvPr id="22" name="Rounded Rectangle 21"/>
+              <a:rPr sz="900" b="0"/>
+              <a:t>Остатки, транзит, открытые заказы, целевой запас</a:t>
+            </a:r>
+          </a:p>
+          <a:p>
+            <a:r>
+              <a:rPr sz="900" b="0"/>
+              <a:t>Прогнозный остаток и дни покрытия</a:t>
+            </a:r>
+          </a:p>
+        </p:txBody>
+      </p:sp>
+      <p:sp>
+        <p:nvSpPr>
+          <p:cNvPr id="22" name="Rectangle 21"/>
           <p:cNvSpPr/>
           <p:nvPr/>
         </p:nvSpPr>
         <p:spPr>
           <a:xfrm>
-            <a:off x="8120000" y="1040000"/>
-            <a:ext cx="1910000" cy="620000"/>
-          </a:xfrm>
-          <a:prstGeom prst="roundRect">
-            <a:avLst/>
-          </a:prstGeom>
-          <a:solidFill>
-            <a:schemeClr val="accent1"/>
-          </a:solidFill>
+            <a:off x="8060000" y="980000"/>
+            <a:ext cx="2030000" cy="5500000"/>
+          </a:xfrm>
+          <a:prstGeom prst="rect">
+            <a:avLst/>
+          </a:prstGeom>
+          <a:noFill/>
+          <a:ln>
+            <a:noFill/>
+          </a:ln>
         </p:spPr>
         <p:style>
           <a:lnRef idx="1">
@@ -3924,10 +3946,6 @@
           <a:lstStyle/>
           <a:p>
             <a:pPr algn="ctr"/>
-            <a:r>
-              <a:rPr sz="1000"/>
-              <a:t>Building Blocks и корректировки</a:t>
-            </a:r>
           </a:p>
         </p:txBody>
       </p:sp>
@@ -3939,8 +3957,8 @@
         </p:nvSpPr>
         <p:spPr>
           <a:xfrm>
-            <a:off x="8120000" y="1760000"/>
-            <a:ext cx="1910000" cy="840000"/>
+            <a:off x="8060000" y="500000"/>
+            <a:ext cx="2030000" cy="380000"/>
           </a:xfrm>
           <a:prstGeom prst="rect">
             <a:avLst/>
@@ -3954,20 +3972,8 @@
           <a:lstStyle/>
           <a:p>
             <a:r>
-              <a:rPr sz="900" b="0"/>
-              <a:t>Объёмные, процентные, замещающие блоки</a:t>
-            </a:r>
-          </a:p>
-          <a:p>
-            <a:r>
-              <a:rPr sz="900" b="0"/>
-              <a:t>Распределение вниз, пересчёт вверх</a:t>
-            </a:r>
-          </a:p>
-          <a:p>
-            <a:r>
-              <a:rPr sz="900" b="0"/>
-              <a:t>Версии, аудит</a:t>
+              <a:rPr sz="1100" b="1"/>
+              <a:t>Обогащение и согласование</a:t>
             </a:r>
           </a:p>
         </p:txBody>
@@ -3980,7 +3986,7 @@
         </p:nvSpPr>
         <p:spPr>
           <a:xfrm>
-            <a:off x="8120000" y="2750000"/>
+            <a:off x="8120000" y="1040000"/>
             <a:ext cx="1910000" cy="620000"/>
           </a:xfrm>
           <a:prstGeom prst="roundRect">
@@ -4011,7 +4017,7 @@
             <a:pPr algn="ctr"/>
             <a:r>
               <a:rPr sz="1000"/>
-              <a:t>Demand Review Meeting</a:t>
+              <a:t>Building Blocks и корректировки</a:t>
             </a:r>
           </a:p>
         </p:txBody>
@@ -4024,8 +4030,8 @@
         </p:nvSpPr>
         <p:spPr>
           <a:xfrm>
-            <a:off x="8120000" y="3470000"/>
-            <a:ext cx="1910000" cy="672000"/>
+            <a:off x="8120000" y="1760000"/>
+            <a:ext cx="1910000" cy="840000"/>
           </a:xfrm>
           <a:prstGeom prst="rect">
             <a:avLst/>
@@ -4040,41 +4046,40 @@
           <a:p>
             <a:r>
               <a:rPr sz="900" b="0"/>
-              <a:t>Консенсус в объёме и в деньгах</a:t>
+              <a:t>Объёмные, процентные, замещающие блоки</a:t>
             </a:r>
           </a:p>
           <a:p>
             <a:r>
               <a:rPr sz="900" b="0"/>
-              <a:t>Согласование исключений</a:t>
+              <a:t>Распределение вниз, пересчёт вверх</a:t>
             </a:r>
           </a:p>
           <a:p>
             <a:r>
               <a:rPr sz="900" b="0"/>
-              <a:t>Согласованный план спроса Sell-In</a:t>
-            </a:r>
-          </a:p>
-        </p:txBody>
-      </p:sp>
-      <p:sp>
-        <p:nvSpPr>
-          <p:cNvPr id="26" name="Rectangle 25"/>
+              <a:t>Версии, аудит</a:t>
+            </a:r>
+          </a:p>
+        </p:txBody>
+      </p:sp>
+      <p:sp>
+        <p:nvSpPr>
+          <p:cNvPr id="26" name="Rounded Rectangle 25"/>
           <p:cNvSpPr/>
           <p:nvPr/>
         </p:nvSpPr>
         <p:spPr>
           <a:xfrm>
-            <a:off x="10120000" y="980000"/>
-            <a:ext cx="2030000" cy="5500000"/>
-          </a:xfrm>
-          <a:prstGeom prst="rect">
-            <a:avLst/>
-          </a:prstGeom>
-          <a:noFill/>
-          <a:ln>
-            <a:noFill/>
-          </a:ln>
+            <a:off x="8120000" y="2750000"/>
+            <a:ext cx="1910000" cy="620000"/>
+          </a:xfrm>
+          <a:prstGeom prst="roundRect">
+            <a:avLst/>
+          </a:prstGeom>
+          <a:solidFill>
+            <a:schemeClr val="accent1"/>
+          </a:solidFill>
         </p:spPr>
         <p:style>
           <a:lnRef idx="1">
@@ -4095,6 +4100,10 @@
           <a:lstStyle/>
           <a:p>
             <a:pPr algn="ctr"/>
+            <a:r>
+              <a:rPr sz="1000"/>
+              <a:t>Demand Review Meeting</a:t>
+            </a:r>
           </a:p>
         </p:txBody>
       </p:sp>
@@ -4106,8 +4115,8 @@
         </p:nvSpPr>
         <p:spPr>
           <a:xfrm>
-            <a:off x="10120000" y="500000"/>
-            <a:ext cx="2030000" cy="380000"/>
+            <a:off x="8120000" y="3470000"/>
+            <a:ext cx="1910000" cy="672000"/>
           </a:xfrm>
           <a:prstGeom prst="rect">
             <a:avLst/>
@@ -4121,29 +4130,42 @@
           <a:lstStyle/>
           <a:p>
             <a:r>
-              <a:rPr sz="1100" b="1"/>
-              <a:t>Публикация и контроль точности</a:t>
-            </a:r>
-          </a:p>
-        </p:txBody>
-      </p:sp>
-      <p:sp>
-        <p:nvSpPr>
-          <p:cNvPr id="28" name="Rounded Rectangle 27"/>
+              <a:rPr sz="900" b="0"/>
+              <a:t>Консенсус в объёме и в деньгах</a:t>
+            </a:r>
+          </a:p>
+          <a:p>
+            <a:r>
+              <a:rPr sz="900" b="0"/>
+              <a:t>Согласование исключений</a:t>
+            </a:r>
+          </a:p>
+          <a:p>
+            <a:r>
+              <a:rPr sz="900" b="0"/>
+              <a:t>Согласованный план спроса Sell-In</a:t>
+            </a:r>
+          </a:p>
+        </p:txBody>
+      </p:sp>
+      <p:sp>
+        <p:nvSpPr>
+          <p:cNvPr id="28" name="Rectangle 27"/>
           <p:cNvSpPr/>
           <p:nvPr/>
         </p:nvSpPr>
         <p:spPr>
           <a:xfrm>
-            <a:off x="10180000" y="1040000"/>
-            <a:ext cx="1910000" cy="620000"/>
-          </a:xfrm>
-          <a:prstGeom prst="roundRect">
-            <a:avLst/>
-          </a:prstGeom>
-          <a:solidFill>
-            <a:schemeClr val="accent1"/>
-          </a:solidFill>
+            <a:off x="10120000" y="980000"/>
+            <a:ext cx="2030000" cy="5500000"/>
+          </a:xfrm>
+          <a:prstGeom prst="rect">
+            <a:avLst/>
+          </a:prstGeom>
+          <a:noFill/>
+          <a:ln>
+            <a:noFill/>
+          </a:ln>
         </p:spPr>
         <p:style>
           <a:lnRef idx="1">
@@ -4164,10 +4186,6 @@
           <a:lstStyle/>
           <a:p>
             <a:pPr algn="ctr"/>
-            <a:r>
-              <a:rPr sz="1000"/>
-              <a:t>Публикация плана спроса</a:t>
-            </a:r>
           </a:p>
         </p:txBody>
       </p:sp>
@@ -4179,8 +4197,8 @@
         </p:nvSpPr>
         <p:spPr>
           <a:xfrm>
-            <a:off x="10180000" y="1760000"/>
-            <a:ext cx="1910000" cy="504000"/>
+            <a:off x="10120000" y="500000"/>
+            <a:ext cx="2030000" cy="380000"/>
           </a:xfrm>
           <a:prstGeom prst="rect">
             <a:avLst/>
@@ -4194,20 +4212,8 @@
           <a:lstStyle/>
           <a:p>
             <a:r>
-              <a:rPr sz="900" b="0"/>
-              <a:t>DFU → SKU, публикация с лагом</a:t>
-            </a:r>
-          </a:p>
-          <a:p>
-            <a:r>
-              <a:rPr sz="900" b="0"/>
-              <a:t>Передача плана в SNP и MEIO</a:t>
-            </a:r>
-          </a:p>
-          <a:p>
-            <a:r>
-              <a:rPr sz="900" b="0"/>
-              <a:t>Версия и дата фиксации плана</a:t>
+              <a:rPr sz="1100" b="1"/>
+              <a:t>Публикация и контроль точности</a:t>
             </a:r>
           </a:p>
         </p:txBody>
@@ -4220,7 +4226,7 @@
         </p:nvSpPr>
         <p:spPr>
           <a:xfrm>
-            <a:off x="10180000" y="2414000"/>
+            <a:off x="10180000" y="1040000"/>
             <a:ext cx="1910000" cy="620000"/>
           </a:xfrm>
           <a:prstGeom prst="roundRect">
@@ -4251,7 +4257,7 @@
             <a:pPr algn="ctr"/>
             <a:r>
               <a:rPr sz="1000"/>
-              <a:t>Сверка с ограниченным планом SNP и решение по разрыву</a:t>
+              <a:t>Публикация плана спроса</a:t>
             </a:r>
           </a:p>
         </p:txBody>
@@ -4264,8 +4270,8 @@
         </p:nvSpPr>
         <p:spPr>
           <a:xfrm>
-            <a:off x="10180000" y="3134000"/>
-            <a:ext cx="1910000" cy="672000"/>
+            <a:off x="10180000" y="1760000"/>
+            <a:ext cx="1910000" cy="504000"/>
           </a:xfrm>
           <a:prstGeom prst="rect">
             <a:avLst/>
@@ -4280,25 +4286,19 @@
           <a:p>
             <a:r>
               <a:rPr sz="900" b="0"/>
-              <a:t>Ограниченный план из SNP</a:t>
+              <a:t>DFU → SKU, публикация с лагом</a:t>
             </a:r>
           </a:p>
           <a:p>
             <a:r>
               <a:rPr sz="900" b="0"/>
-              <a:t>Дефициты и избытки по периодам</a:t>
+              <a:t>Передача плана в SNP и MEIO</a:t>
             </a:r>
           </a:p>
           <a:p>
             <a:r>
               <a:rPr sz="900" b="0"/>
-              <a:t>Приоритизация клиентов и SKU</a:t>
-            </a:r>
-          </a:p>
-          <a:p>
-            <a:r>
-              <a:rPr sz="900" b="0"/>
-              <a:t>Решение по разрыву</a:t>
+              <a:t>Версия и дата фиксации плана</a:t>
             </a:r>
           </a:p>
         </p:txBody>
@@ -4311,7 +4311,7 @@
         </p:nvSpPr>
         <p:spPr>
           <a:xfrm>
-            <a:off x="10180000" y="3956000"/>
+            <a:off x="10180000" y="2414000"/>
             <a:ext cx="1910000" cy="620000"/>
           </a:xfrm>
           <a:prstGeom prst="roundRect">
@@ -4342,7 +4342,7 @@
             <a:pPr algn="ctr"/>
             <a:r>
               <a:rPr sz="1000"/>
-              <a:t>Контроль точности и FVA</a:t>
+              <a:t>Сверка с ограниченным планом SNP и решение по разрыву</a:t>
             </a:r>
           </a:p>
         </p:txBody>
@@ -4355,8 +4355,8 @@
         </p:nvSpPr>
         <p:spPr>
           <a:xfrm>
-            <a:off x="10180000" y="4676000"/>
-            <a:ext cx="1910000" cy="1008000"/>
+            <a:off x="10180000" y="3134000"/>
+            <a:ext cx="1910000" cy="672000"/>
           </a:xfrm>
           <a:prstGeom prst="rect">
             <a:avLst/>
@@ -4371,45 +4371,45 @@
           <a:p>
             <a:r>
               <a:rPr sz="900" b="0"/>
-              <a:t>FA, MAPE, BIAS, WAPE по версии и лагу</a:t>
+              <a:t>Ограниченный план из SNP</a:t>
             </a:r>
           </a:p>
           <a:p>
             <a:r>
               <a:rPr sz="900" b="0"/>
-              <a:t>FVA: наивный → статистика → Building Blocks → консенсус</a:t>
+              <a:t>Дефициты и избытки по периодам</a:t>
             </a:r>
           </a:p>
           <a:p>
             <a:r>
               <a:rPr sz="900" b="0"/>
-              <a:t>BIAS по авторам корректировок</a:t>
+              <a:t>Приоритизация клиентов и SKU</a:t>
             </a:r>
           </a:p>
           <a:p>
             <a:r>
               <a:rPr sz="900" b="0"/>
-              <a:t>Алерты точности и разбор причин</a:t>
-            </a:r>
-          </a:p>
-        </p:txBody>
-      </p:sp>
-      <p:sp>
-        <p:nvSpPr>
-          <p:cNvPr id="34" name="Rectangle 33"/>
+              <a:t>Решение по разрыву</a:t>
+            </a:r>
+          </a:p>
+        </p:txBody>
+      </p:sp>
+      <p:sp>
+        <p:nvSpPr>
+          <p:cNvPr id="34" name="Rounded Rectangle 33"/>
           <p:cNvSpPr/>
           <p:nvPr/>
         </p:nvSpPr>
         <p:spPr>
           <a:xfrm>
-            <a:off x="10180000" y="5834000"/>
+            <a:off x="10180000" y="3956000"/>
             <a:ext cx="1910000" cy="620000"/>
           </a:xfrm>
-          <a:prstGeom prst="rect">
+          <a:prstGeom prst="roundRect">
             <a:avLst/>
           </a:prstGeom>
           <a:solidFill>
-            <a:schemeClr val="accent2"/>
+            <a:schemeClr val="accent1"/>
           </a:solidFill>
         </p:spPr>
         <p:style>
@@ -4432,22 +4432,69 @@
           <a:p>
             <a:pPr algn="ctr"/>
             <a:r>
-              <a:rPr sz="900"/>
-              <a:t>Передача неограниченного плана спроса в SNP и MEIO</a:t>
-            </a:r>
-          </a:p>
-        </p:txBody>
-      </p:sp>
-      <p:sp>
-        <p:nvSpPr>
-          <p:cNvPr id="35" name="Rectangle 34"/>
+              <a:rPr sz="1000"/>
+              <a:t>Контроль точности и FVA</a:t>
+            </a:r>
+          </a:p>
+        </p:txBody>
+      </p:sp>
+      <p:sp>
+        <p:nvSpPr>
+          <p:cNvPr id="35" name="TextBox 34"/>
+          <p:cNvSpPr txBox="1"/>
+          <p:nvPr/>
+        </p:nvSpPr>
+        <p:spPr>
+          <a:xfrm>
+            <a:off x="10180000" y="4676000"/>
+            <a:ext cx="1910000" cy="1008000"/>
+          </a:xfrm>
+          <a:prstGeom prst="rect">
+            <a:avLst/>
+          </a:prstGeom>
+          <a:noFill/>
+        </p:spPr>
+        <p:txBody>
+          <a:bodyPr wrap="square">
+            <a:spAutoFit/>
+          </a:bodyPr>
+          <a:lstStyle/>
+          <a:p>
+            <a:r>
+              <a:rPr sz="900" b="0"/>
+              <a:t>FA, MAPE, BIAS, WAPE по версии и лагу</a:t>
+            </a:r>
+          </a:p>
+          <a:p>
+            <a:r>
+              <a:rPr sz="900" b="0"/>
+              <a:t>FVA: наивный → статистика → Building Blocks → консенсус</a:t>
+            </a:r>
+          </a:p>
+          <a:p>
+            <a:r>
+              <a:rPr sz="900" b="0"/>
+              <a:t>BIAS по авторам корректировок</a:t>
+            </a:r>
+          </a:p>
+          <a:p>
+            <a:r>
+              <a:rPr sz="900" b="0"/>
+              <a:t>Алерты точности и разбор причин</a:t>
+            </a:r>
+          </a:p>
+        </p:txBody>
+      </p:sp>
+      <p:sp>
+        <p:nvSpPr>
+          <p:cNvPr id="36" name="Rectangle 35"/>
           <p:cNvSpPr/>
           <p:nvPr/>
         </p:nvSpPr>
         <p:spPr>
           <a:xfrm>
-            <a:off x="100000" y="980000"/>
-            <a:ext cx="1600000" cy="620000"/>
+            <a:off x="10180000" y="5834000"/>
+            <a:ext cx="1910000" cy="620000"/>
           </a:xfrm>
           <a:prstGeom prst="rect">
             <a:avLst/>
@@ -4477,20 +4524,20 @@
             <a:pPr algn="ctr"/>
             <a:r>
               <a:rPr sz="900"/>
-              <a:t>История продаж и заказы из ERP / DWH</a:t>
-            </a:r>
-          </a:p>
-        </p:txBody>
-      </p:sp>
-      <p:sp>
-        <p:nvSpPr>
-          <p:cNvPr id="36" name="Rectangle 35"/>
+              <a:t>Передача неограниченного плана спроса в SNP и MEIO</a:t>
+            </a:r>
+          </a:p>
+        </p:txBody>
+      </p:sp>
+      <p:sp>
+        <p:nvSpPr>
+          <p:cNvPr id="37" name="Rectangle 36"/>
           <p:cNvSpPr/>
           <p:nvPr/>
         </p:nvSpPr>
         <p:spPr>
           <a:xfrm>
-            <a:off x="100000" y="1677142"/>
+            <a:off x="100000" y="980000"/>
             <a:ext cx="1600000" cy="620000"/>
           </a:xfrm>
           <a:prstGeom prst="rect">
@@ -4521,20 +4568,20 @@
             <a:pPr algn="ctr"/>
             <a:r>
               <a:rPr sz="900"/>
-              <a:t>План производства собственной переработки из SNP и PS</a:t>
-            </a:r>
-          </a:p>
-        </p:txBody>
-      </p:sp>
-      <p:sp>
-        <p:nvSpPr>
-          <p:cNvPr id="37" name="Rectangle 36"/>
+              <a:t>История продаж и заказы из ERP / DWH</a:t>
+            </a:r>
+          </a:p>
+        </p:txBody>
+      </p:sp>
+      <p:sp>
+        <p:nvSpPr>
+          <p:cNvPr id="38" name="Rectangle 37"/>
           <p:cNvSpPr/>
           <p:nvPr/>
         </p:nvSpPr>
         <p:spPr>
           <a:xfrm>
-            <a:off x="100000" y="2374284"/>
+            <a:off x="100000" y="1677142"/>
             <a:ext cx="1600000" cy="620000"/>
           </a:xfrm>
           <a:prstGeom prst="rect">
@@ -4565,20 +4612,20 @@
             <a:pPr algn="ctr"/>
             <a:r>
               <a:rPr sz="900"/>
-              <a:t>Промо-план из TPM/NRM</a:t>
-            </a:r>
-          </a:p>
-        </p:txBody>
-      </p:sp>
-      <p:sp>
-        <p:nvSpPr>
-          <p:cNvPr id="38" name="Rectangle 37"/>
+              <a:t>План производства собственной переработки из SNP и PS</a:t>
+            </a:r>
+          </a:p>
+        </p:txBody>
+      </p:sp>
+      <p:sp>
+        <p:nvSpPr>
+          <p:cNvPr id="39" name="Rectangle 38"/>
           <p:cNvSpPr/>
           <p:nvPr/>
         </p:nvSpPr>
         <p:spPr>
           <a:xfrm>
-            <a:off x="100000" y="3071426"/>
+            <a:off x="100000" y="2374284"/>
             <a:ext cx="1600000" cy="620000"/>
           </a:xfrm>
           <a:prstGeom prst="rect">
@@ -4609,20 +4656,20 @@
             <a:pPr algn="ctr"/>
             <a:r>
               <a:rPr sz="900"/>
-              <a:t>Sell-Out и остатки клиента из ERP</a:t>
-            </a:r>
-          </a:p>
-        </p:txBody>
-      </p:sp>
-      <p:sp>
-        <p:nvSpPr>
-          <p:cNvPr id="39" name="Rectangle 38"/>
+              <a:t>Промо-план из TPM/NRM</a:t>
+            </a:r>
+          </a:p>
+        </p:txBody>
+      </p:sp>
+      <p:sp>
+        <p:nvSpPr>
+          <p:cNvPr id="40" name="Rectangle 39"/>
           <p:cNvSpPr/>
           <p:nvPr/>
         </p:nvSpPr>
         <p:spPr>
           <a:xfrm>
-            <a:off x="100000" y="3768568"/>
+            <a:off x="100000" y="3071426"/>
             <a:ext cx="1600000" cy="620000"/>
           </a:xfrm>
           <a:prstGeom prst="rect">
@@ -4653,20 +4700,20 @@
             <a:pPr algn="ctr"/>
             <a:r>
               <a:rPr sz="900"/>
-              <a:t>Открытые заказы и целевой запас клиента</a:t>
-            </a:r>
-          </a:p>
-        </p:txBody>
-      </p:sp>
-      <p:sp>
-        <p:nvSpPr>
-          <p:cNvPr id="40" name="Rectangle 39"/>
+              <a:t>Sell-Out и остатки клиента из ERP</a:t>
+            </a:r>
+          </a:p>
+        </p:txBody>
+      </p:sp>
+      <p:sp>
+        <p:nvSpPr>
+          <p:cNvPr id="41" name="Rectangle 40"/>
           <p:cNvSpPr/>
           <p:nvPr/>
         </p:nvSpPr>
         <p:spPr>
           <a:xfrm>
-            <a:off x="100000" y="4465710"/>
+            <a:off x="100000" y="3768568"/>
             <a:ext cx="1600000" cy="620000"/>
           </a:xfrm>
           <a:prstGeom prst="rect">
@@ -4697,20 +4744,20 @@
             <a:pPr algn="ctr"/>
             <a:r>
               <a:rPr sz="900"/>
-              <a:t>Категорийный менеджмент: проверка Building Blocks</a:t>
-            </a:r>
-          </a:p>
-        </p:txBody>
-      </p:sp>
-      <p:sp>
-        <p:nvSpPr>
-          <p:cNvPr id="41" name="Rectangle 40"/>
+              <a:t>Открытые заказы и целевой запас клиента</a:t>
+            </a:r>
+          </a:p>
+        </p:txBody>
+      </p:sp>
+      <p:sp>
+        <p:nvSpPr>
+          <p:cNvPr id="42" name="Rectangle 41"/>
           <p:cNvSpPr/>
           <p:nvPr/>
         </p:nvSpPr>
         <p:spPr>
           <a:xfrm>
-            <a:off x="100000" y="5162852"/>
+            <a:off x="100000" y="4465710"/>
             <a:ext cx="1600000" cy="620000"/>
           </a:xfrm>
           <a:prstGeom prst="rect">
@@ -4741,20 +4788,20 @@
             <a:pPr algn="ctr"/>
             <a:r>
               <a:rPr sz="900"/>
-              <a:t>Коммерческие финансы: консенсус-прогноз в деньгах</a:t>
-            </a:r>
-          </a:p>
-        </p:txBody>
-      </p:sp>
-      <p:sp>
-        <p:nvSpPr>
-          <p:cNvPr id="42" name="Rectangle 41"/>
+              <a:t>Категорийный менеджмент: проверка Building Blocks</a:t>
+            </a:r>
+          </a:p>
+        </p:txBody>
+      </p:sp>
+      <p:sp>
+        <p:nvSpPr>
+          <p:cNvPr id="43" name="Rectangle 42"/>
           <p:cNvSpPr/>
           <p:nvPr/>
         </p:nvSpPr>
         <p:spPr>
           <a:xfrm>
-            <a:off x="100000" y="5859994"/>
+            <a:off x="100000" y="5162852"/>
             <a:ext cx="1600000" cy="620000"/>
           </a:xfrm>
           <a:prstGeom prst="rect">
@@ -4785,96 +4832,68 @@
             <a:pPr algn="ctr"/>
             <a:r>
               <a:rPr sz="900"/>
-              <a:t>Получение ограниченного прогноза из модуля SNP</a:t>
-            </a:r>
-          </a:p>
-        </p:txBody>
-      </p:sp>
-      <p:cxnSp>
-        <p:nvCxnSpPr>
-          <p:cNvPr id="43" name="Connector 42"/>
-          <p:cNvCxnSpPr>
-            <a:stCxn id="4" idx="3"/>
-            <a:endCxn id="8" idx="1"/>
-          </p:cNvCxnSpPr>
-          <p:nvPr/>
-        </p:nvCxnSpPr>
-        <p:spPr>
-          <a:xfrm>
-            <a:off x="3850000" y="1350000"/>
-            <a:ext cx="150000" cy="0"/>
-          </a:xfrm>
-          <a:prstGeom prst="line">
-            <a:avLst/>
-          </a:prstGeom>
-          <a:ln>
-            <a:tailEnd type="triangle"/>
-          </a:ln>
+              <a:t>Коммерческие финансы: консенсус-прогноз в деньгах</a:t>
+            </a:r>
+          </a:p>
+        </p:txBody>
+      </p:sp>
+      <p:sp>
+        <p:nvSpPr>
+          <p:cNvPr id="44" name="Rectangle 43"/>
+          <p:cNvSpPr/>
+          <p:nvPr/>
+        </p:nvSpPr>
+        <p:spPr>
+          <a:xfrm>
+            <a:off x="100000" y="5859994"/>
+            <a:ext cx="1600000" cy="620000"/>
+          </a:xfrm>
+          <a:prstGeom prst="rect">
+            <a:avLst/>
+          </a:prstGeom>
+          <a:solidFill>
+            <a:schemeClr val="accent2"/>
+          </a:solidFill>
         </p:spPr>
         <p:style>
-          <a:lnRef idx="2">
+          <a:lnRef idx="1">
             <a:schemeClr val="accent1"/>
           </a:lnRef>
-          <a:fillRef idx="0">
+          <a:fillRef idx="3">
             <a:schemeClr val="accent1"/>
           </a:fillRef>
-          <a:effectRef idx="1">
+          <a:effectRef idx="2">
             <a:schemeClr val="accent1"/>
           </a:effectRef>
           <a:fontRef idx="minor">
-            <a:schemeClr val="tx1"/>
+            <a:schemeClr val="lt1"/>
           </a:fontRef>
         </p:style>
-      </p:cxnSp>
-      <p:cxnSp>
-        <p:nvCxnSpPr>
-          <p:cNvPr id="44" name="Connector 43"/>
-          <p:cNvCxnSpPr>
-            <a:stCxn id="8" idx="2"/>
-            <a:endCxn id="10" idx="0"/>
-          </p:cNvCxnSpPr>
-          <p:nvPr/>
-        </p:nvCxnSpPr>
-        <p:spPr>
-          <a:xfrm>
-            <a:off x="4955000" y="1660000"/>
-            <a:ext cx="0" cy="922000"/>
-          </a:xfrm>
-          <a:prstGeom prst="line">
-            <a:avLst/>
-          </a:prstGeom>
-          <a:ln>
-            <a:tailEnd type="triangle"/>
-          </a:ln>
-        </p:spPr>
-        <p:style>
-          <a:lnRef idx="2">
-            <a:schemeClr val="accent1"/>
-          </a:lnRef>
-          <a:fillRef idx="0">
-            <a:schemeClr val="accent1"/>
-          </a:fillRef>
-          <a:effectRef idx="1">
-            <a:schemeClr val="accent1"/>
-          </a:effectRef>
-          <a:fontRef idx="minor">
-            <a:schemeClr val="tx1"/>
-          </a:fontRef>
-        </p:style>
-      </p:cxnSp>
+        <p:txBody>
+          <a:bodyPr rtlCol="0" anchor="ctr" wrap="square"/>
+          <a:lstStyle/>
+          <a:p>
+            <a:pPr algn="ctr"/>
+            <a:r>
+              <a:rPr sz="900"/>
+              <a:t>Получение ограниченного прогноза из модуля SNP</a:t>
+            </a:r>
+          </a:p>
+        </p:txBody>
+      </p:sp>
       <p:cxnSp>
         <p:nvCxnSpPr>
           <p:cNvPr id="45" name="Connector 44"/>
           <p:cNvCxnSpPr>
-            <a:stCxn id="8" idx="2"/>
-            <a:endCxn id="12" idx="0"/>
+            <a:stCxn id="4" idx="2"/>
+            <a:endCxn id="6" idx="0"/>
           </p:cNvCxnSpPr>
           <p:nvPr/>
         </p:nvCxnSpPr>
         <p:spPr>
           <a:xfrm>
-            <a:off x="4955000" y="1660000"/>
-            <a:ext cx="0" cy="2464000"/>
+            <a:off x="2895000" y="1660000"/>
+            <a:ext cx="0" cy="1426000"/>
           </a:xfrm>
           <a:prstGeom prst="line">
             <a:avLst/>
@@ -4902,15 +4921,15 @@
         <p:nvCxnSpPr>
           <p:cNvPr id="46" name="Connector 45"/>
           <p:cNvCxnSpPr>
-            <a:stCxn id="10" idx="2"/>
-            <a:endCxn id="13" idx="0"/>
+            <a:stCxn id="6" idx="3"/>
+            <a:endCxn id="10" idx="1"/>
           </p:cNvCxnSpPr>
           <p:nvPr/>
         </p:nvCxnSpPr>
         <p:spPr>
-          <a:xfrm>
-            <a:off x="4955000" y="3202000"/>
-            <a:ext cx="0" cy="1692000"/>
+          <a:xfrm flipV="1">
+            <a:off x="3850000" y="1350000"/>
+            <a:ext cx="150000" cy="2046000"/>
           </a:xfrm>
           <a:prstGeom prst="line">
             <a:avLst/>
@@ -4938,15 +4957,15 @@
         <p:nvCxnSpPr>
           <p:cNvPr id="47" name="Connector 46"/>
           <p:cNvCxnSpPr>
-            <a:stCxn id="12" idx="2"/>
-            <a:endCxn id="13" idx="0"/>
+            <a:stCxn id="10" idx="2"/>
+            <a:endCxn id="12" idx="0"/>
           </p:cNvCxnSpPr>
           <p:nvPr/>
         </p:nvCxnSpPr>
         <p:spPr>
           <a:xfrm>
-            <a:off x="4955000" y="4744000"/>
-            <a:ext cx="0" cy="150000"/>
+            <a:off x="4955000" y="1660000"/>
+            <a:ext cx="0" cy="922000"/>
           </a:xfrm>
           <a:prstGeom prst="line">
             <a:avLst/>
@@ -4974,15 +4993,15 @@
         <p:nvCxnSpPr>
           <p:cNvPr id="48" name="Connector 47"/>
           <p:cNvCxnSpPr>
-            <a:stCxn id="13" idx="0"/>
-            <a:endCxn id="17" idx="2"/>
+            <a:stCxn id="10" idx="2"/>
+            <a:endCxn id="14" idx="0"/>
           </p:cNvCxnSpPr>
           <p:nvPr/>
         </p:nvCxnSpPr>
         <p:spPr>
-          <a:xfrm flipV="1">
+          <a:xfrm>
             <a:off x="4955000" y="1660000"/>
-            <a:ext cx="2060000" cy="3234000"/>
+            <a:ext cx="0" cy="2464000"/>
           </a:xfrm>
           <a:prstGeom prst="line">
             <a:avLst/>
@@ -5010,15 +5029,15 @@
         <p:nvCxnSpPr>
           <p:cNvPr id="49" name="Connector 48"/>
           <p:cNvCxnSpPr>
-            <a:stCxn id="13" idx="0"/>
-            <a:endCxn id="18" idx="2"/>
+            <a:stCxn id="12" idx="2"/>
+            <a:endCxn id="15" idx="0"/>
           </p:cNvCxnSpPr>
           <p:nvPr/>
         </p:nvCxnSpPr>
         <p:spPr>
-          <a:xfrm flipV="1">
-            <a:off x="4955000" y="2430000"/>
-            <a:ext cx="2060000" cy="2464000"/>
+          <a:xfrm>
+            <a:off x="4955000" y="3202000"/>
+            <a:ext cx="0" cy="1692000"/>
           </a:xfrm>
           <a:prstGeom prst="line">
             <a:avLst/>
@@ -5046,15 +5065,15 @@
         <p:nvCxnSpPr>
           <p:cNvPr id="50" name="Connector 49"/>
           <p:cNvCxnSpPr>
-            <a:stCxn id="17" idx="3"/>
-            <a:endCxn id="22" idx="1"/>
+            <a:stCxn id="14" idx="2"/>
+            <a:endCxn id="15" idx="0"/>
           </p:cNvCxnSpPr>
           <p:nvPr/>
         </p:nvCxnSpPr>
         <p:spPr>
           <a:xfrm>
-            <a:off x="7970000" y="1350000"/>
-            <a:ext cx="150000" cy="0"/>
+            <a:off x="4955000" y="4744000"/>
+            <a:ext cx="0" cy="150000"/>
           </a:xfrm>
           <a:prstGeom prst="line">
             <a:avLst/>
@@ -5082,15 +5101,15 @@
         <p:nvCxnSpPr>
           <p:cNvPr id="51" name="Connector 50"/>
           <p:cNvCxnSpPr>
-            <a:stCxn id="18" idx="3"/>
-            <a:endCxn id="22" idx="1"/>
+            <a:stCxn id="15" idx="0"/>
+            <a:endCxn id="19" idx="2"/>
           </p:cNvCxnSpPr>
           <p:nvPr/>
         </p:nvCxnSpPr>
         <p:spPr>
           <a:xfrm flipV="1">
-            <a:off x="7970000" y="1350000"/>
-            <a:ext cx="150000" cy="770000"/>
+            <a:off x="4955000" y="1660000"/>
+            <a:ext cx="2060000" cy="3234000"/>
           </a:xfrm>
           <a:prstGeom prst="line">
             <a:avLst/>
@@ -5118,15 +5137,15 @@
         <p:nvCxnSpPr>
           <p:cNvPr id="52" name="Connector 51"/>
           <p:cNvCxnSpPr>
-            <a:stCxn id="22" idx="2"/>
-            <a:endCxn id="24" idx="0"/>
+            <a:stCxn id="15" idx="0"/>
+            <a:endCxn id="20" idx="2"/>
           </p:cNvCxnSpPr>
           <p:nvPr/>
         </p:nvCxnSpPr>
         <p:spPr>
-          <a:xfrm>
-            <a:off x="9075000" y="1660000"/>
-            <a:ext cx="0" cy="1090000"/>
+          <a:xfrm flipV="1">
+            <a:off x="4955000" y="2430000"/>
+            <a:ext cx="2060000" cy="2464000"/>
           </a:xfrm>
           <a:prstGeom prst="line">
             <a:avLst/>
@@ -5154,15 +5173,15 @@
         <p:nvCxnSpPr>
           <p:cNvPr id="53" name="Connector 52"/>
           <p:cNvCxnSpPr>
-            <a:stCxn id="24" idx="3"/>
-            <a:endCxn id="28" idx="1"/>
+            <a:stCxn id="19" idx="3"/>
+            <a:endCxn id="24" idx="1"/>
           </p:cNvCxnSpPr>
           <p:nvPr/>
         </p:nvCxnSpPr>
         <p:spPr>
-          <a:xfrm flipV="1">
-            <a:off x="10030000" y="1350000"/>
-            <a:ext cx="150000" cy="1710000"/>
+          <a:xfrm>
+            <a:off x="7970000" y="1350000"/>
+            <a:ext cx="150000" cy="0"/>
           </a:xfrm>
           <a:prstGeom prst="line">
             <a:avLst/>
@@ -5190,15 +5209,15 @@
         <p:nvCxnSpPr>
           <p:cNvPr id="54" name="Connector 53"/>
           <p:cNvCxnSpPr>
-            <a:stCxn id="28" idx="2"/>
-            <a:endCxn id="30" idx="0"/>
+            <a:stCxn id="20" idx="3"/>
+            <a:endCxn id="24" idx="1"/>
           </p:cNvCxnSpPr>
           <p:nvPr/>
         </p:nvCxnSpPr>
         <p:spPr>
-          <a:xfrm>
-            <a:off x="11135000" y="1660000"/>
-            <a:ext cx="0" cy="754000"/>
+          <a:xfrm flipV="1">
+            <a:off x="7970000" y="1350000"/>
+            <a:ext cx="150000" cy="770000"/>
           </a:xfrm>
           <a:prstGeom prst="line">
             <a:avLst/>
@@ -5226,15 +5245,15 @@
         <p:nvCxnSpPr>
           <p:cNvPr id="55" name="Connector 54"/>
           <p:cNvCxnSpPr>
-            <a:stCxn id="28" idx="2"/>
-            <a:endCxn id="32" idx="0"/>
+            <a:stCxn id="24" idx="2"/>
+            <a:endCxn id="26" idx="0"/>
           </p:cNvCxnSpPr>
           <p:nvPr/>
         </p:nvCxnSpPr>
         <p:spPr>
           <a:xfrm>
-            <a:off x="11135000" y="1660000"/>
-            <a:ext cx="0" cy="2296000"/>
+            <a:off x="9075000" y="1660000"/>
+            <a:ext cx="0" cy="1090000"/>
           </a:xfrm>
           <a:prstGeom prst="line">
             <a:avLst/>
@@ -5262,17 +5281,17 @@
         <p:nvCxnSpPr>
           <p:cNvPr id="56" name="Connector 55"/>
           <p:cNvCxnSpPr>
-            <a:stCxn id="32" idx="1"/>
-            <a:endCxn id="8" idx="3"/>
+            <a:stCxn id="26" idx="3"/>
+            <a:endCxn id="30" idx="1"/>
           </p:cNvCxnSpPr>
           <p:nvPr/>
         </p:nvCxnSpPr>
         <p:spPr>
-          <a:xfrm flipH="1" flipV="1">
-            <a:off x="5910000" y="1350000"/>
-            <a:ext cx="4270000" cy="2916000"/>
-          </a:xfrm>
-          <a:prstGeom prst="bentConnector3">
+          <a:xfrm flipV="1">
+            <a:off x="10030000" y="1350000"/>
+            <a:ext cx="150000" cy="1710000"/>
+          </a:xfrm>
+          <a:prstGeom prst="line">
             <a:avLst/>
           </a:prstGeom>
           <a:ln>
@@ -5298,15 +5317,15 @@
         <p:nvCxnSpPr>
           <p:cNvPr id="57" name="Connector 56"/>
           <p:cNvCxnSpPr>
-            <a:stCxn id="35" idx="3"/>
-            <a:endCxn id="4" idx="1"/>
+            <a:stCxn id="30" idx="2"/>
+            <a:endCxn id="32" idx="0"/>
           </p:cNvCxnSpPr>
           <p:nvPr/>
         </p:nvCxnSpPr>
         <p:spPr>
           <a:xfrm>
-            <a:off x="1700000" y="1290000"/>
-            <a:ext cx="240000" cy="60000"/>
+            <a:off x="11135000" y="1660000"/>
+            <a:ext cx="0" cy="754000"/>
           </a:xfrm>
           <a:prstGeom prst="line">
             <a:avLst/>
@@ -5334,15 +5353,15 @@
         <p:nvCxnSpPr>
           <p:cNvPr id="58" name="Connector 57"/>
           <p:cNvCxnSpPr>
-            <a:stCxn id="36" idx="3"/>
-            <a:endCxn id="4" idx="1"/>
+            <a:stCxn id="30" idx="2"/>
+            <a:endCxn id="34" idx="0"/>
           </p:cNvCxnSpPr>
           <p:nvPr/>
         </p:nvCxnSpPr>
         <p:spPr>
-          <a:xfrm flipV="1">
-            <a:off x="1700000" y="1350000"/>
-            <a:ext cx="240000" cy="637142"/>
+          <a:xfrm>
+            <a:off x="11135000" y="1660000"/>
+            <a:ext cx="0" cy="2296000"/>
           </a:xfrm>
           <a:prstGeom prst="line">
             <a:avLst/>
@@ -5370,15 +5389,15 @@
         <p:nvCxnSpPr>
           <p:cNvPr id="59" name="Connector 58"/>
           <p:cNvCxnSpPr>
-            <a:stCxn id="37" idx="3"/>
-            <a:endCxn id="13" idx="1"/>
+            <a:stCxn id="34" idx="1"/>
+            <a:endCxn id="10" idx="3"/>
           </p:cNvCxnSpPr>
           <p:nvPr/>
         </p:nvCxnSpPr>
         <p:spPr>
-          <a:xfrm>
-            <a:off x="1700000" y="2684284"/>
-            <a:ext cx="2300000" cy="2519716"/>
+          <a:xfrm flipH="1" flipV="1">
+            <a:off x="5910000" y="1350000"/>
+            <a:ext cx="4270000" cy="2916000"/>
           </a:xfrm>
           <a:prstGeom prst="bentConnector3">
             <a:avLst/>
@@ -5406,17 +5425,17 @@
         <p:nvCxnSpPr>
           <p:cNvPr id="60" name="Connector 59"/>
           <p:cNvCxnSpPr>
-            <a:stCxn id="38" idx="3"/>
-            <a:endCxn id="18" idx="1"/>
+            <a:stCxn id="37" idx="3"/>
+            <a:endCxn id="4" idx="1"/>
           </p:cNvCxnSpPr>
           <p:nvPr/>
         </p:nvCxnSpPr>
         <p:spPr>
-          <a:xfrm flipV="1">
-            <a:off x="1700000" y="2120000"/>
-            <a:ext cx="4360000" cy="1261426"/>
-          </a:xfrm>
-          <a:prstGeom prst="bentConnector3">
+          <a:xfrm>
+            <a:off x="1700000" y="1290000"/>
+            <a:ext cx="240000" cy="60000"/>
+          </a:xfrm>
+          <a:prstGeom prst="line">
             <a:avLst/>
           </a:prstGeom>
           <a:ln>
@@ -5442,17 +5461,17 @@
         <p:nvCxnSpPr>
           <p:cNvPr id="61" name="Connector 60"/>
           <p:cNvCxnSpPr>
-            <a:stCxn id="39" idx="3"/>
-            <a:endCxn id="18" idx="1"/>
+            <a:stCxn id="38" idx="3"/>
+            <a:endCxn id="6" idx="1"/>
           </p:cNvCxnSpPr>
           <p:nvPr/>
         </p:nvCxnSpPr>
         <p:spPr>
-          <a:xfrm flipV="1">
-            <a:off x="1700000" y="2120000"/>
-            <a:ext cx="4360000" cy="1958568"/>
-          </a:xfrm>
-          <a:prstGeom prst="bentConnector3">
+          <a:xfrm>
+            <a:off x="1700000" y="1987142"/>
+            <a:ext cx="240000" cy="1408858"/>
+          </a:xfrm>
+          <a:prstGeom prst="line">
             <a:avLst/>
           </a:prstGeom>
           <a:ln>
@@ -5478,15 +5497,15 @@
         <p:nvCxnSpPr>
           <p:cNvPr id="62" name="Connector 61"/>
           <p:cNvCxnSpPr>
-            <a:stCxn id="40" idx="3"/>
-            <a:endCxn id="22" idx="1"/>
+            <a:stCxn id="39" idx="3"/>
+            <a:endCxn id="15" idx="1"/>
           </p:cNvCxnSpPr>
           <p:nvPr/>
         </p:nvCxnSpPr>
         <p:spPr>
-          <a:xfrm flipV="1">
-            <a:off x="1700000" y="1350000"/>
-            <a:ext cx="6420000" cy="3425710"/>
+          <a:xfrm>
+            <a:off x="1700000" y="2684284"/>
+            <a:ext cx="2300000" cy="2519716"/>
           </a:xfrm>
           <a:prstGeom prst="bentConnector3">
             <a:avLst/>
@@ -5514,15 +5533,15 @@
         <p:nvCxnSpPr>
           <p:cNvPr id="63" name="Connector 62"/>
           <p:cNvCxnSpPr>
-            <a:stCxn id="41" idx="3"/>
-            <a:endCxn id="24" idx="1"/>
+            <a:stCxn id="40" idx="3"/>
+            <a:endCxn id="20" idx="1"/>
           </p:cNvCxnSpPr>
           <p:nvPr/>
         </p:nvCxnSpPr>
         <p:spPr>
           <a:xfrm flipV="1">
-            <a:off x="1700000" y="3060000"/>
-            <a:ext cx="6420000" cy="2412852"/>
+            <a:off x="1700000" y="2120000"/>
+            <a:ext cx="4360000" cy="1261426"/>
           </a:xfrm>
           <a:prstGeom prst="bentConnector3">
             <a:avLst/>
@@ -5550,15 +5569,15 @@
         <p:nvCxnSpPr>
           <p:cNvPr id="64" name="Connector 63"/>
           <p:cNvCxnSpPr>
-            <a:stCxn id="42" idx="3"/>
-            <a:endCxn id="30" idx="1"/>
+            <a:stCxn id="41" idx="3"/>
+            <a:endCxn id="20" idx="1"/>
           </p:cNvCxnSpPr>
           <p:nvPr/>
         </p:nvCxnSpPr>
         <p:spPr>
           <a:xfrm flipV="1">
-            <a:off x="1700000" y="2724000"/>
-            <a:ext cx="8480000" cy="3445994"/>
+            <a:off x="1700000" y="2120000"/>
+            <a:ext cx="4360000" cy="1958568"/>
           </a:xfrm>
           <a:prstGeom prst="bentConnector3">
             <a:avLst/>
@@ -5586,8 +5605,116 @@
         <p:nvCxnSpPr>
           <p:cNvPr id="65" name="Connector 64"/>
           <p:cNvCxnSpPr>
-            <a:stCxn id="28" idx="2"/>
-            <a:endCxn id="34" idx="0"/>
+            <a:stCxn id="42" idx="3"/>
+            <a:endCxn id="24" idx="1"/>
+          </p:cNvCxnSpPr>
+          <p:nvPr/>
+        </p:nvCxnSpPr>
+        <p:spPr>
+          <a:xfrm flipV="1">
+            <a:off x="1700000" y="1350000"/>
+            <a:ext cx="6420000" cy="3425710"/>
+          </a:xfrm>
+          <a:prstGeom prst="bentConnector3">
+            <a:avLst/>
+          </a:prstGeom>
+          <a:ln>
+            <a:tailEnd type="triangle"/>
+          </a:ln>
+        </p:spPr>
+        <p:style>
+          <a:lnRef idx="2">
+            <a:schemeClr val="accent1"/>
+          </a:lnRef>
+          <a:fillRef idx="0">
+            <a:schemeClr val="accent1"/>
+          </a:fillRef>
+          <a:effectRef idx="1">
+            <a:schemeClr val="accent1"/>
+          </a:effectRef>
+          <a:fontRef idx="minor">
+            <a:schemeClr val="tx1"/>
+          </a:fontRef>
+        </p:style>
+      </p:cxnSp>
+      <p:cxnSp>
+        <p:nvCxnSpPr>
+          <p:cNvPr id="66" name="Connector 65"/>
+          <p:cNvCxnSpPr>
+            <a:stCxn id="43" idx="3"/>
+            <a:endCxn id="26" idx="1"/>
+          </p:cNvCxnSpPr>
+          <p:nvPr/>
+        </p:nvCxnSpPr>
+        <p:spPr>
+          <a:xfrm flipV="1">
+            <a:off x="1700000" y="3060000"/>
+            <a:ext cx="6420000" cy="2412852"/>
+          </a:xfrm>
+          <a:prstGeom prst="bentConnector3">
+            <a:avLst/>
+          </a:prstGeom>
+          <a:ln>
+            <a:tailEnd type="triangle"/>
+          </a:ln>
+        </p:spPr>
+        <p:style>
+          <a:lnRef idx="2">
+            <a:schemeClr val="accent1"/>
+          </a:lnRef>
+          <a:fillRef idx="0">
+            <a:schemeClr val="accent1"/>
+          </a:fillRef>
+          <a:effectRef idx="1">
+            <a:schemeClr val="accent1"/>
+          </a:effectRef>
+          <a:fontRef idx="minor">
+            <a:schemeClr val="tx1"/>
+          </a:fontRef>
+        </p:style>
+      </p:cxnSp>
+      <p:cxnSp>
+        <p:nvCxnSpPr>
+          <p:cNvPr id="67" name="Connector 66"/>
+          <p:cNvCxnSpPr>
+            <a:stCxn id="44" idx="3"/>
+            <a:endCxn id="32" idx="1"/>
+          </p:cNvCxnSpPr>
+          <p:nvPr/>
+        </p:nvCxnSpPr>
+        <p:spPr>
+          <a:xfrm flipV="1">
+            <a:off x="1700000" y="2724000"/>
+            <a:ext cx="8480000" cy="3445994"/>
+          </a:xfrm>
+          <a:prstGeom prst="bentConnector3">
+            <a:avLst/>
+          </a:prstGeom>
+          <a:ln>
+            <a:tailEnd type="triangle"/>
+          </a:ln>
+        </p:spPr>
+        <p:style>
+          <a:lnRef idx="2">
+            <a:schemeClr val="accent1"/>
+          </a:lnRef>
+          <a:fillRef idx="0">
+            <a:schemeClr val="accent1"/>
+          </a:fillRef>
+          <a:effectRef idx="1">
+            <a:schemeClr val="accent1"/>
+          </a:effectRef>
+          <a:fontRef idx="minor">
+            <a:schemeClr val="tx1"/>
+          </a:fontRef>
+        </p:style>
+      </p:cxnSp>
+      <p:cxnSp>
+        <p:nvCxnSpPr>
+          <p:cNvPr id="68" name="Connector 67"/>
+          <p:cNvCxnSpPr>
+            <a:stCxn id="30" idx="2"/>
+            <a:endCxn id="36" idx="0"/>
           </p:cNvCxnSpPr>
           <p:nvPr/>
         </p:nvCxnSpPr>

--- a/In.Plan DP process 06-09-2026.pptx
+++ b/In.Plan DP process 06-09-2026.pptx
@@ -4487,7 +4487,7 @@
       </p:sp>
       <p:sp>
         <p:nvSpPr>
-          <p:cNvPr id="36" name="Rectangle 35"/>
+          <p:cNvPr id="36" name="Rounded Rectangle 35"/>
           <p:cNvSpPr/>
           <p:nvPr/>
         </p:nvSpPr>
@@ -4496,11 +4496,11 @@
             <a:off x="10180000" y="5834000"/>
             <a:ext cx="1910000" cy="620000"/>
           </a:xfrm>
-          <a:prstGeom prst="rect">
+          <a:prstGeom prst="roundRect">
             <a:avLst/>
           </a:prstGeom>
           <a:solidFill>
-            <a:schemeClr val="accent2"/>
+            <a:schemeClr val="accent1"/>
           </a:solidFill>
         </p:spPr>
         <p:style>
@@ -4523,22 +4523,69 @@
           <a:p>
             <a:pPr algn="ctr"/>
             <a:r>
-              <a:rPr sz="900"/>
-              <a:t>Передача неограниченного плана спроса в SNP и MEIO</a:t>
-            </a:r>
-          </a:p>
-        </p:txBody>
-      </p:sp>
-      <p:sp>
-        <p:nvSpPr>
-          <p:cNvPr id="37" name="Rectangle 36"/>
+              <a:rPr sz="1000"/>
+              <a:t>Анализ предупреждений</a:t>
+            </a:r>
+          </a:p>
+        </p:txBody>
+      </p:sp>
+      <p:sp>
+        <p:nvSpPr>
+          <p:cNvPr id="37" name="TextBox 36"/>
+          <p:cNvSpPr txBox="1"/>
+          <p:nvPr/>
+        </p:nvSpPr>
+        <p:spPr>
+          <a:xfrm>
+            <a:off x="10180000" y="6554000"/>
+            <a:ext cx="1910000" cy="1344000"/>
+          </a:xfrm>
+          <a:prstGeom prst="rect">
+            <a:avLst/>
+          </a:prstGeom>
+          <a:noFill/>
+        </p:spPr>
+        <p:txBody>
+          <a:bodyPr wrap="square">
+            <a:spAutoFit/>
+          </a:bodyPr>
+          <a:lstStyle/>
+          <a:p>
+            <a:r>
+              <a:rPr sz="900" b="0"/>
+              <a:t>Предупреждение: точность ниже порога по FA или BIAS</a:t>
+            </a:r>
+          </a:p>
+          <a:p>
+            <a:r>
+              <a:rPr sz="900" b="0"/>
+              <a:t>Предупреждение: разрыв с ограниченным планом SNP</a:t>
+            </a:r>
+          </a:p>
+          <a:p>
+            <a:r>
+              <a:rPr sz="900" b="0"/>
+              <a:t>Предупреждение: прогноз без истории по новому DFU</a:t>
+            </a:r>
+          </a:p>
+          <a:p>
+            <a:r>
+              <a:rPr sz="900" b="0"/>
+              <a:t>Предупреждение: ручная корректировка без обоснования</a:t>
+            </a:r>
+          </a:p>
+        </p:txBody>
+      </p:sp>
+      <p:sp>
+        <p:nvSpPr>
+          <p:cNvPr id="38" name="Rectangle 37"/>
           <p:cNvSpPr/>
           <p:nvPr/>
         </p:nvSpPr>
         <p:spPr>
           <a:xfrm>
-            <a:off x="100000" y="980000"/>
-            <a:ext cx="1600000" cy="620000"/>
+            <a:off x="10180000" y="8048000"/>
+            <a:ext cx="1910000" cy="620000"/>
           </a:xfrm>
           <a:prstGeom prst="rect">
             <a:avLst/>
@@ -4568,20 +4615,20 @@
             <a:pPr algn="ctr"/>
             <a:r>
               <a:rPr sz="900"/>
-              <a:t>История продаж и заказы из ERP / DWH</a:t>
-            </a:r>
-          </a:p>
-        </p:txBody>
-      </p:sp>
-      <p:sp>
-        <p:nvSpPr>
-          <p:cNvPr id="38" name="Rectangle 37"/>
+              <a:t>Передача неограниченного плана спроса в SNP и MEIO</a:t>
+            </a:r>
+          </a:p>
+        </p:txBody>
+      </p:sp>
+      <p:sp>
+        <p:nvSpPr>
+          <p:cNvPr id="39" name="Rectangle 38"/>
           <p:cNvSpPr/>
           <p:nvPr/>
         </p:nvSpPr>
         <p:spPr>
           <a:xfrm>
-            <a:off x="100000" y="1677142"/>
+            <a:off x="100000" y="980000"/>
             <a:ext cx="1600000" cy="620000"/>
           </a:xfrm>
           <a:prstGeom prst="rect">
@@ -4612,20 +4659,20 @@
             <a:pPr algn="ctr"/>
             <a:r>
               <a:rPr sz="900"/>
-              <a:t>План производства собственной переработки из SNP и PS</a:t>
-            </a:r>
-          </a:p>
-        </p:txBody>
-      </p:sp>
-      <p:sp>
-        <p:nvSpPr>
-          <p:cNvPr id="39" name="Rectangle 38"/>
+              <a:t>История продаж и заказы из ERP / DWH</a:t>
+            </a:r>
+          </a:p>
+        </p:txBody>
+      </p:sp>
+      <p:sp>
+        <p:nvSpPr>
+          <p:cNvPr id="40" name="Rectangle 39"/>
           <p:cNvSpPr/>
           <p:nvPr/>
         </p:nvSpPr>
         <p:spPr>
           <a:xfrm>
-            <a:off x="100000" y="2374284"/>
+            <a:off x="100000" y="1677142"/>
             <a:ext cx="1600000" cy="620000"/>
           </a:xfrm>
           <a:prstGeom prst="rect">
@@ -4656,20 +4703,20 @@
             <a:pPr algn="ctr"/>
             <a:r>
               <a:rPr sz="900"/>
-              <a:t>Промо-план из TPM/NRM</a:t>
-            </a:r>
-          </a:p>
-        </p:txBody>
-      </p:sp>
-      <p:sp>
-        <p:nvSpPr>
-          <p:cNvPr id="40" name="Rectangle 39"/>
+              <a:t>План производства собственной переработки из SNP и PS</a:t>
+            </a:r>
+          </a:p>
+        </p:txBody>
+      </p:sp>
+      <p:sp>
+        <p:nvSpPr>
+          <p:cNvPr id="41" name="Rectangle 40"/>
           <p:cNvSpPr/>
           <p:nvPr/>
         </p:nvSpPr>
         <p:spPr>
           <a:xfrm>
-            <a:off x="100000" y="3071426"/>
+            <a:off x="100000" y="2374284"/>
             <a:ext cx="1600000" cy="620000"/>
           </a:xfrm>
           <a:prstGeom prst="rect">
@@ -4700,20 +4747,20 @@
             <a:pPr algn="ctr"/>
             <a:r>
               <a:rPr sz="900"/>
-              <a:t>Sell-Out и остатки клиента из ERP</a:t>
-            </a:r>
-          </a:p>
-        </p:txBody>
-      </p:sp>
-      <p:sp>
-        <p:nvSpPr>
-          <p:cNvPr id="41" name="Rectangle 40"/>
+              <a:t>Промо-план из TPM/NRM</a:t>
+            </a:r>
+          </a:p>
+        </p:txBody>
+      </p:sp>
+      <p:sp>
+        <p:nvSpPr>
+          <p:cNvPr id="42" name="Rectangle 41"/>
           <p:cNvSpPr/>
           <p:nvPr/>
         </p:nvSpPr>
         <p:spPr>
           <a:xfrm>
-            <a:off x="100000" y="3768568"/>
+            <a:off x="100000" y="3071426"/>
             <a:ext cx="1600000" cy="620000"/>
           </a:xfrm>
           <a:prstGeom prst="rect">
@@ -4744,20 +4791,20 @@
             <a:pPr algn="ctr"/>
             <a:r>
               <a:rPr sz="900"/>
-              <a:t>Открытые заказы и целевой запас клиента</a:t>
-            </a:r>
-          </a:p>
-        </p:txBody>
-      </p:sp>
-      <p:sp>
-        <p:nvSpPr>
-          <p:cNvPr id="42" name="Rectangle 41"/>
+              <a:t>Sell-Out и остатки клиента из ERP</a:t>
+            </a:r>
+          </a:p>
+        </p:txBody>
+      </p:sp>
+      <p:sp>
+        <p:nvSpPr>
+          <p:cNvPr id="43" name="Rectangle 42"/>
           <p:cNvSpPr/>
           <p:nvPr/>
         </p:nvSpPr>
         <p:spPr>
           <a:xfrm>
-            <a:off x="100000" y="4465710"/>
+            <a:off x="100000" y="3768568"/>
             <a:ext cx="1600000" cy="620000"/>
           </a:xfrm>
           <a:prstGeom prst="rect">
@@ -4788,20 +4835,20 @@
             <a:pPr algn="ctr"/>
             <a:r>
               <a:rPr sz="900"/>
-              <a:t>Категорийный менеджмент: проверка Building Blocks</a:t>
-            </a:r>
-          </a:p>
-        </p:txBody>
-      </p:sp>
-      <p:sp>
-        <p:nvSpPr>
-          <p:cNvPr id="43" name="Rectangle 42"/>
+              <a:t>Открытые заказы и целевой запас клиента</a:t>
+            </a:r>
+          </a:p>
+        </p:txBody>
+      </p:sp>
+      <p:sp>
+        <p:nvSpPr>
+          <p:cNvPr id="44" name="Rectangle 43"/>
           <p:cNvSpPr/>
           <p:nvPr/>
         </p:nvSpPr>
         <p:spPr>
           <a:xfrm>
-            <a:off x="100000" y="5162852"/>
+            <a:off x="100000" y="4465710"/>
             <a:ext cx="1600000" cy="620000"/>
           </a:xfrm>
           <a:prstGeom prst="rect">
@@ -4832,20 +4879,20 @@
             <a:pPr algn="ctr"/>
             <a:r>
               <a:rPr sz="900"/>
-              <a:t>Коммерческие финансы: консенсус-прогноз в деньгах</a:t>
-            </a:r>
-          </a:p>
-        </p:txBody>
-      </p:sp>
-      <p:sp>
-        <p:nvSpPr>
-          <p:cNvPr id="44" name="Rectangle 43"/>
+              <a:t>Категорийный менеджмент: проверка Building Blocks</a:t>
+            </a:r>
+          </a:p>
+        </p:txBody>
+      </p:sp>
+      <p:sp>
+        <p:nvSpPr>
+          <p:cNvPr id="45" name="Rectangle 44"/>
           <p:cNvSpPr/>
           <p:nvPr/>
         </p:nvSpPr>
         <p:spPr>
           <a:xfrm>
-            <a:off x="100000" y="5859994"/>
+            <a:off x="100000" y="5162852"/>
             <a:ext cx="1600000" cy="620000"/>
           </a:xfrm>
           <a:prstGeom prst="rect">
@@ -4876,6 +4923,50 @@
             <a:pPr algn="ctr"/>
             <a:r>
               <a:rPr sz="900"/>
+              <a:t>Коммерческие финансы: консенсус-прогноз в деньгах</a:t>
+            </a:r>
+          </a:p>
+        </p:txBody>
+      </p:sp>
+      <p:sp>
+        <p:nvSpPr>
+          <p:cNvPr id="46" name="Rectangle 45"/>
+          <p:cNvSpPr/>
+          <p:nvPr/>
+        </p:nvSpPr>
+        <p:spPr>
+          <a:xfrm>
+            <a:off x="100000" y="5859994"/>
+            <a:ext cx="1600000" cy="620000"/>
+          </a:xfrm>
+          <a:prstGeom prst="rect">
+            <a:avLst/>
+          </a:prstGeom>
+          <a:solidFill>
+            <a:schemeClr val="accent2"/>
+          </a:solidFill>
+        </p:spPr>
+        <p:style>
+          <a:lnRef idx="1">
+            <a:schemeClr val="accent1"/>
+          </a:lnRef>
+          <a:fillRef idx="3">
+            <a:schemeClr val="accent1"/>
+          </a:fillRef>
+          <a:effectRef idx="2">
+            <a:schemeClr val="accent1"/>
+          </a:effectRef>
+          <a:fontRef idx="minor">
+            <a:schemeClr val="lt1"/>
+          </a:fontRef>
+        </p:style>
+        <p:txBody>
+          <a:bodyPr rtlCol="0" anchor="ctr" wrap="square"/>
+          <a:lstStyle/>
+          <a:p>
+            <a:pPr algn="ctr"/>
+            <a:r>
+              <a:rPr sz="900"/>
               <a:t>Получение ограниченного прогноза из модуля SNP</a:t>
             </a:r>
           </a:p>
@@ -4883,7 +4974,7 @@
       </p:sp>
       <p:cxnSp>
         <p:nvCxnSpPr>
-          <p:cNvPr id="45" name="Connector 44"/>
+          <p:cNvPr id="47" name="Connector 46"/>
           <p:cNvCxnSpPr>
             <a:stCxn id="4" idx="2"/>
             <a:endCxn id="6" idx="0"/>
@@ -4894,78 +4985,6 @@
           <a:xfrm>
             <a:off x="2895000" y="1660000"/>
             <a:ext cx="0" cy="1426000"/>
-          </a:xfrm>
-          <a:prstGeom prst="line">
-            <a:avLst/>
-          </a:prstGeom>
-          <a:ln>
-            <a:tailEnd type="triangle"/>
-          </a:ln>
-        </p:spPr>
-        <p:style>
-          <a:lnRef idx="2">
-            <a:schemeClr val="accent1"/>
-          </a:lnRef>
-          <a:fillRef idx="0">
-            <a:schemeClr val="accent1"/>
-          </a:fillRef>
-          <a:effectRef idx="1">
-            <a:schemeClr val="accent1"/>
-          </a:effectRef>
-          <a:fontRef idx="minor">
-            <a:schemeClr val="tx1"/>
-          </a:fontRef>
-        </p:style>
-      </p:cxnSp>
-      <p:cxnSp>
-        <p:nvCxnSpPr>
-          <p:cNvPr id="46" name="Connector 45"/>
-          <p:cNvCxnSpPr>
-            <a:stCxn id="6" idx="3"/>
-            <a:endCxn id="10" idx="1"/>
-          </p:cNvCxnSpPr>
-          <p:nvPr/>
-        </p:nvCxnSpPr>
-        <p:spPr>
-          <a:xfrm flipV="1">
-            <a:off x="3850000" y="1350000"/>
-            <a:ext cx="150000" cy="2046000"/>
-          </a:xfrm>
-          <a:prstGeom prst="line">
-            <a:avLst/>
-          </a:prstGeom>
-          <a:ln>
-            <a:tailEnd type="triangle"/>
-          </a:ln>
-        </p:spPr>
-        <p:style>
-          <a:lnRef idx="2">
-            <a:schemeClr val="accent1"/>
-          </a:lnRef>
-          <a:fillRef idx="0">
-            <a:schemeClr val="accent1"/>
-          </a:fillRef>
-          <a:effectRef idx="1">
-            <a:schemeClr val="accent1"/>
-          </a:effectRef>
-          <a:fontRef idx="minor">
-            <a:schemeClr val="tx1"/>
-          </a:fontRef>
-        </p:style>
-      </p:cxnSp>
-      <p:cxnSp>
-        <p:nvCxnSpPr>
-          <p:cNvPr id="47" name="Connector 46"/>
-          <p:cNvCxnSpPr>
-            <a:stCxn id="10" idx="2"/>
-            <a:endCxn id="12" idx="0"/>
-          </p:cNvCxnSpPr>
-          <p:nvPr/>
-        </p:nvCxnSpPr>
-        <p:spPr>
-          <a:xfrm>
-            <a:off x="4955000" y="1660000"/>
-            <a:ext cx="0" cy="922000"/>
           </a:xfrm>
           <a:prstGeom prst="line">
             <a:avLst/>
@@ -4993,15 +5012,15 @@
         <p:nvCxnSpPr>
           <p:cNvPr id="48" name="Connector 47"/>
           <p:cNvCxnSpPr>
-            <a:stCxn id="10" idx="2"/>
-            <a:endCxn id="14" idx="0"/>
+            <a:stCxn id="6" idx="3"/>
+            <a:endCxn id="10" idx="1"/>
           </p:cNvCxnSpPr>
           <p:nvPr/>
         </p:nvCxnSpPr>
         <p:spPr>
-          <a:xfrm>
-            <a:off x="4955000" y="1660000"/>
-            <a:ext cx="0" cy="2464000"/>
+          <a:xfrm flipV="1">
+            <a:off x="3850000" y="1350000"/>
+            <a:ext cx="150000" cy="2046000"/>
           </a:xfrm>
           <a:prstGeom prst="line">
             <a:avLst/>
@@ -5029,15 +5048,15 @@
         <p:nvCxnSpPr>
           <p:cNvPr id="49" name="Connector 48"/>
           <p:cNvCxnSpPr>
-            <a:stCxn id="12" idx="2"/>
-            <a:endCxn id="15" idx="0"/>
+            <a:stCxn id="10" idx="2"/>
+            <a:endCxn id="12" idx="0"/>
           </p:cNvCxnSpPr>
           <p:nvPr/>
         </p:nvCxnSpPr>
         <p:spPr>
           <a:xfrm>
-            <a:off x="4955000" y="3202000"/>
-            <a:ext cx="0" cy="1692000"/>
+            <a:off x="4955000" y="1660000"/>
+            <a:ext cx="0" cy="922000"/>
           </a:xfrm>
           <a:prstGeom prst="line">
             <a:avLst/>
@@ -5065,15 +5084,15 @@
         <p:nvCxnSpPr>
           <p:cNvPr id="50" name="Connector 49"/>
           <p:cNvCxnSpPr>
-            <a:stCxn id="14" idx="2"/>
-            <a:endCxn id="15" idx="0"/>
+            <a:stCxn id="10" idx="2"/>
+            <a:endCxn id="14" idx="0"/>
           </p:cNvCxnSpPr>
           <p:nvPr/>
         </p:nvCxnSpPr>
         <p:spPr>
           <a:xfrm>
-            <a:off x="4955000" y="4744000"/>
-            <a:ext cx="0" cy="150000"/>
+            <a:off x="4955000" y="1660000"/>
+            <a:ext cx="0" cy="2464000"/>
           </a:xfrm>
           <a:prstGeom prst="line">
             <a:avLst/>
@@ -5101,15 +5120,15 @@
         <p:nvCxnSpPr>
           <p:cNvPr id="51" name="Connector 50"/>
           <p:cNvCxnSpPr>
-            <a:stCxn id="15" idx="0"/>
-            <a:endCxn id="19" idx="2"/>
+            <a:stCxn id="12" idx="2"/>
+            <a:endCxn id="15" idx="0"/>
           </p:cNvCxnSpPr>
           <p:nvPr/>
         </p:nvCxnSpPr>
         <p:spPr>
-          <a:xfrm flipV="1">
-            <a:off x="4955000" y="1660000"/>
-            <a:ext cx="2060000" cy="3234000"/>
+          <a:xfrm>
+            <a:off x="4955000" y="3202000"/>
+            <a:ext cx="0" cy="1692000"/>
           </a:xfrm>
           <a:prstGeom prst="line">
             <a:avLst/>
@@ -5137,15 +5156,15 @@
         <p:nvCxnSpPr>
           <p:cNvPr id="52" name="Connector 51"/>
           <p:cNvCxnSpPr>
-            <a:stCxn id="15" idx="0"/>
-            <a:endCxn id="20" idx="2"/>
+            <a:stCxn id="14" idx="2"/>
+            <a:endCxn id="15" idx="0"/>
           </p:cNvCxnSpPr>
           <p:nvPr/>
         </p:nvCxnSpPr>
         <p:spPr>
-          <a:xfrm flipV="1">
-            <a:off x="4955000" y="2430000"/>
-            <a:ext cx="2060000" cy="2464000"/>
+          <a:xfrm>
+            <a:off x="4955000" y="4744000"/>
+            <a:ext cx="0" cy="150000"/>
           </a:xfrm>
           <a:prstGeom prst="line">
             <a:avLst/>
@@ -5173,15 +5192,15 @@
         <p:nvCxnSpPr>
           <p:cNvPr id="53" name="Connector 52"/>
           <p:cNvCxnSpPr>
-            <a:stCxn id="19" idx="3"/>
-            <a:endCxn id="24" idx="1"/>
+            <a:stCxn id="15" idx="0"/>
+            <a:endCxn id="19" idx="2"/>
           </p:cNvCxnSpPr>
           <p:nvPr/>
         </p:nvCxnSpPr>
         <p:spPr>
-          <a:xfrm>
-            <a:off x="7970000" y="1350000"/>
-            <a:ext cx="150000" cy="0"/>
+          <a:xfrm flipV="1">
+            <a:off x="4955000" y="1660000"/>
+            <a:ext cx="2060000" cy="3234000"/>
           </a:xfrm>
           <a:prstGeom prst="line">
             <a:avLst/>
@@ -5209,15 +5228,15 @@
         <p:nvCxnSpPr>
           <p:cNvPr id="54" name="Connector 53"/>
           <p:cNvCxnSpPr>
-            <a:stCxn id="20" idx="3"/>
-            <a:endCxn id="24" idx="1"/>
+            <a:stCxn id="15" idx="0"/>
+            <a:endCxn id="20" idx="2"/>
           </p:cNvCxnSpPr>
           <p:nvPr/>
         </p:nvCxnSpPr>
         <p:spPr>
           <a:xfrm flipV="1">
-            <a:off x="7970000" y="1350000"/>
-            <a:ext cx="150000" cy="770000"/>
+            <a:off x="4955000" y="2430000"/>
+            <a:ext cx="2060000" cy="2464000"/>
           </a:xfrm>
           <a:prstGeom prst="line">
             <a:avLst/>
@@ -5245,15 +5264,15 @@
         <p:nvCxnSpPr>
           <p:cNvPr id="55" name="Connector 54"/>
           <p:cNvCxnSpPr>
-            <a:stCxn id="24" idx="2"/>
-            <a:endCxn id="26" idx="0"/>
+            <a:stCxn id="19" idx="3"/>
+            <a:endCxn id="24" idx="1"/>
           </p:cNvCxnSpPr>
           <p:nvPr/>
         </p:nvCxnSpPr>
         <p:spPr>
           <a:xfrm>
-            <a:off x="9075000" y="1660000"/>
-            <a:ext cx="0" cy="1090000"/>
+            <a:off x="7970000" y="1350000"/>
+            <a:ext cx="150000" cy="0"/>
           </a:xfrm>
           <a:prstGeom prst="line">
             <a:avLst/>
@@ -5281,15 +5300,15 @@
         <p:nvCxnSpPr>
           <p:cNvPr id="56" name="Connector 55"/>
           <p:cNvCxnSpPr>
-            <a:stCxn id="26" idx="3"/>
-            <a:endCxn id="30" idx="1"/>
+            <a:stCxn id="20" idx="3"/>
+            <a:endCxn id="24" idx="1"/>
           </p:cNvCxnSpPr>
           <p:nvPr/>
         </p:nvCxnSpPr>
         <p:spPr>
           <a:xfrm flipV="1">
-            <a:off x="10030000" y="1350000"/>
-            <a:ext cx="150000" cy="1710000"/>
+            <a:off x="7970000" y="1350000"/>
+            <a:ext cx="150000" cy="770000"/>
           </a:xfrm>
           <a:prstGeom prst="line">
             <a:avLst/>
@@ -5317,15 +5336,15 @@
         <p:nvCxnSpPr>
           <p:cNvPr id="57" name="Connector 56"/>
           <p:cNvCxnSpPr>
-            <a:stCxn id="30" idx="2"/>
-            <a:endCxn id="32" idx="0"/>
+            <a:stCxn id="24" idx="2"/>
+            <a:endCxn id="26" idx="0"/>
           </p:cNvCxnSpPr>
           <p:nvPr/>
         </p:nvCxnSpPr>
         <p:spPr>
           <a:xfrm>
-            <a:off x="11135000" y="1660000"/>
-            <a:ext cx="0" cy="754000"/>
+            <a:off x="9075000" y="1660000"/>
+            <a:ext cx="0" cy="1090000"/>
           </a:xfrm>
           <a:prstGeom prst="line">
             <a:avLst/>
@@ -5353,15 +5372,15 @@
         <p:nvCxnSpPr>
           <p:cNvPr id="58" name="Connector 57"/>
           <p:cNvCxnSpPr>
-            <a:stCxn id="30" idx="2"/>
-            <a:endCxn id="34" idx="0"/>
+            <a:stCxn id="26" idx="3"/>
+            <a:endCxn id="30" idx="1"/>
           </p:cNvCxnSpPr>
           <p:nvPr/>
         </p:nvCxnSpPr>
         <p:spPr>
-          <a:xfrm>
-            <a:off x="11135000" y="1660000"/>
-            <a:ext cx="0" cy="2296000"/>
+          <a:xfrm flipV="1">
+            <a:off x="10030000" y="1350000"/>
+            <a:ext cx="150000" cy="1710000"/>
           </a:xfrm>
           <a:prstGeom prst="line">
             <a:avLst/>
@@ -5389,17 +5408,17 @@
         <p:nvCxnSpPr>
           <p:cNvPr id="59" name="Connector 58"/>
           <p:cNvCxnSpPr>
-            <a:stCxn id="34" idx="1"/>
-            <a:endCxn id="10" idx="3"/>
+            <a:stCxn id="30" idx="2"/>
+            <a:endCxn id="32" idx="0"/>
           </p:cNvCxnSpPr>
           <p:nvPr/>
         </p:nvCxnSpPr>
         <p:spPr>
-          <a:xfrm flipH="1" flipV="1">
-            <a:off x="5910000" y="1350000"/>
-            <a:ext cx="4270000" cy="2916000"/>
-          </a:xfrm>
-          <a:prstGeom prst="bentConnector3">
+          <a:xfrm>
+            <a:off x="11135000" y="1660000"/>
+            <a:ext cx="0" cy="754000"/>
+          </a:xfrm>
+          <a:prstGeom prst="line">
             <a:avLst/>
           </a:prstGeom>
           <a:ln>
@@ -5425,15 +5444,15 @@
         <p:nvCxnSpPr>
           <p:cNvPr id="60" name="Connector 59"/>
           <p:cNvCxnSpPr>
-            <a:stCxn id="37" idx="3"/>
-            <a:endCxn id="4" idx="1"/>
+            <a:stCxn id="30" idx="2"/>
+            <a:endCxn id="34" idx="0"/>
           </p:cNvCxnSpPr>
           <p:nvPr/>
         </p:nvCxnSpPr>
         <p:spPr>
           <a:xfrm>
-            <a:off x="1700000" y="1290000"/>
-            <a:ext cx="240000" cy="60000"/>
+            <a:off x="11135000" y="1660000"/>
+            <a:ext cx="0" cy="2296000"/>
           </a:xfrm>
           <a:prstGeom prst="line">
             <a:avLst/>
@@ -5461,17 +5480,17 @@
         <p:nvCxnSpPr>
           <p:cNvPr id="61" name="Connector 60"/>
           <p:cNvCxnSpPr>
-            <a:stCxn id="38" idx="3"/>
-            <a:endCxn id="6" idx="1"/>
+            <a:stCxn id="34" idx="1"/>
+            <a:endCxn id="10" idx="3"/>
           </p:cNvCxnSpPr>
           <p:nvPr/>
         </p:nvCxnSpPr>
         <p:spPr>
-          <a:xfrm>
-            <a:off x="1700000" y="1987142"/>
-            <a:ext cx="240000" cy="1408858"/>
-          </a:xfrm>
-          <a:prstGeom prst="line">
+          <a:xfrm flipH="1" flipV="1">
+            <a:off x="5910000" y="1350000"/>
+            <a:ext cx="4270000" cy="2916000"/>
+          </a:xfrm>
+          <a:prstGeom prst="bentConnector3">
             <a:avLst/>
           </a:prstGeom>
           <a:ln>
@@ -5497,17 +5516,17 @@
         <p:nvCxnSpPr>
           <p:cNvPr id="62" name="Connector 61"/>
           <p:cNvCxnSpPr>
-            <a:stCxn id="39" idx="3"/>
-            <a:endCxn id="15" idx="1"/>
+            <a:stCxn id="34" idx="2"/>
+            <a:endCxn id="36" idx="0"/>
           </p:cNvCxnSpPr>
           <p:nvPr/>
         </p:nvCxnSpPr>
         <p:spPr>
           <a:xfrm>
-            <a:off x="1700000" y="2684284"/>
-            <a:ext cx="2300000" cy="2519716"/>
-          </a:xfrm>
-          <a:prstGeom prst="bentConnector3">
+            <a:off x="11135000" y="4576000"/>
+            <a:ext cx="0" cy="1258000"/>
+          </a:xfrm>
+          <a:prstGeom prst="line">
             <a:avLst/>
           </a:prstGeom>
           <a:ln>
@@ -5533,17 +5552,17 @@
         <p:nvCxnSpPr>
           <p:cNvPr id="63" name="Connector 62"/>
           <p:cNvCxnSpPr>
-            <a:stCxn id="40" idx="3"/>
-            <a:endCxn id="20" idx="1"/>
+            <a:stCxn id="39" idx="3"/>
+            <a:endCxn id="4" idx="1"/>
           </p:cNvCxnSpPr>
           <p:nvPr/>
         </p:nvCxnSpPr>
         <p:spPr>
-          <a:xfrm flipV="1">
-            <a:off x="1700000" y="2120000"/>
-            <a:ext cx="4360000" cy="1261426"/>
-          </a:xfrm>
-          <a:prstGeom prst="bentConnector3">
+          <a:xfrm>
+            <a:off x="1700000" y="1290000"/>
+            <a:ext cx="240000" cy="60000"/>
+          </a:xfrm>
+          <a:prstGeom prst="line">
             <a:avLst/>
           </a:prstGeom>
           <a:ln>
@@ -5569,17 +5588,17 @@
         <p:nvCxnSpPr>
           <p:cNvPr id="64" name="Connector 63"/>
           <p:cNvCxnSpPr>
-            <a:stCxn id="41" idx="3"/>
-            <a:endCxn id="20" idx="1"/>
+            <a:stCxn id="40" idx="3"/>
+            <a:endCxn id="6" idx="1"/>
           </p:cNvCxnSpPr>
           <p:nvPr/>
         </p:nvCxnSpPr>
         <p:spPr>
-          <a:xfrm flipV="1">
-            <a:off x="1700000" y="2120000"/>
-            <a:ext cx="4360000" cy="1958568"/>
-          </a:xfrm>
-          <a:prstGeom prst="bentConnector3">
+          <a:xfrm>
+            <a:off x="1700000" y="1987142"/>
+            <a:ext cx="240000" cy="1408858"/>
+          </a:xfrm>
+          <a:prstGeom prst="line">
             <a:avLst/>
           </a:prstGeom>
           <a:ln>
@@ -5605,15 +5624,15 @@
         <p:nvCxnSpPr>
           <p:cNvPr id="65" name="Connector 64"/>
           <p:cNvCxnSpPr>
-            <a:stCxn id="42" idx="3"/>
-            <a:endCxn id="24" idx="1"/>
+            <a:stCxn id="41" idx="3"/>
+            <a:endCxn id="15" idx="1"/>
           </p:cNvCxnSpPr>
           <p:nvPr/>
         </p:nvCxnSpPr>
         <p:spPr>
-          <a:xfrm flipV="1">
-            <a:off x="1700000" y="1350000"/>
-            <a:ext cx="6420000" cy="3425710"/>
+          <a:xfrm>
+            <a:off x="1700000" y="2684284"/>
+            <a:ext cx="2300000" cy="2519716"/>
           </a:xfrm>
           <a:prstGeom prst="bentConnector3">
             <a:avLst/>
@@ -5641,15 +5660,15 @@
         <p:nvCxnSpPr>
           <p:cNvPr id="66" name="Connector 65"/>
           <p:cNvCxnSpPr>
-            <a:stCxn id="43" idx="3"/>
-            <a:endCxn id="26" idx="1"/>
+            <a:stCxn id="42" idx="3"/>
+            <a:endCxn id="20" idx="1"/>
           </p:cNvCxnSpPr>
           <p:nvPr/>
         </p:nvCxnSpPr>
         <p:spPr>
           <a:xfrm flipV="1">
-            <a:off x="1700000" y="3060000"/>
-            <a:ext cx="6420000" cy="2412852"/>
+            <a:off x="1700000" y="2120000"/>
+            <a:ext cx="4360000" cy="1261426"/>
           </a:xfrm>
           <a:prstGeom prst="bentConnector3">
             <a:avLst/>
@@ -5677,15 +5696,15 @@
         <p:nvCxnSpPr>
           <p:cNvPr id="67" name="Connector 66"/>
           <p:cNvCxnSpPr>
-            <a:stCxn id="44" idx="3"/>
-            <a:endCxn id="32" idx="1"/>
+            <a:stCxn id="43" idx="3"/>
+            <a:endCxn id="20" idx="1"/>
           </p:cNvCxnSpPr>
           <p:nvPr/>
         </p:nvCxnSpPr>
         <p:spPr>
           <a:xfrm flipV="1">
-            <a:off x="1700000" y="2724000"/>
-            <a:ext cx="8480000" cy="3445994"/>
+            <a:off x="1700000" y="2120000"/>
+            <a:ext cx="4360000" cy="1958568"/>
           </a:xfrm>
           <a:prstGeom prst="bentConnector3">
             <a:avLst/>
@@ -5713,15 +5732,123 @@
         <p:nvCxnSpPr>
           <p:cNvPr id="68" name="Connector 67"/>
           <p:cNvCxnSpPr>
+            <a:stCxn id="44" idx="3"/>
+            <a:endCxn id="24" idx="1"/>
+          </p:cNvCxnSpPr>
+          <p:nvPr/>
+        </p:nvCxnSpPr>
+        <p:spPr>
+          <a:xfrm flipV="1">
+            <a:off x="1700000" y="1350000"/>
+            <a:ext cx="6420000" cy="3425710"/>
+          </a:xfrm>
+          <a:prstGeom prst="bentConnector3">
+            <a:avLst/>
+          </a:prstGeom>
+          <a:ln>
+            <a:tailEnd type="triangle"/>
+          </a:ln>
+        </p:spPr>
+        <p:style>
+          <a:lnRef idx="2">
+            <a:schemeClr val="accent1"/>
+          </a:lnRef>
+          <a:fillRef idx="0">
+            <a:schemeClr val="accent1"/>
+          </a:fillRef>
+          <a:effectRef idx="1">
+            <a:schemeClr val="accent1"/>
+          </a:effectRef>
+          <a:fontRef idx="minor">
+            <a:schemeClr val="tx1"/>
+          </a:fontRef>
+        </p:style>
+      </p:cxnSp>
+      <p:cxnSp>
+        <p:nvCxnSpPr>
+          <p:cNvPr id="69" name="Connector 68"/>
+          <p:cNvCxnSpPr>
+            <a:stCxn id="45" idx="3"/>
+            <a:endCxn id="26" idx="1"/>
+          </p:cNvCxnSpPr>
+          <p:nvPr/>
+        </p:nvCxnSpPr>
+        <p:spPr>
+          <a:xfrm flipV="1">
+            <a:off x="1700000" y="3060000"/>
+            <a:ext cx="6420000" cy="2412852"/>
+          </a:xfrm>
+          <a:prstGeom prst="bentConnector3">
+            <a:avLst/>
+          </a:prstGeom>
+          <a:ln>
+            <a:tailEnd type="triangle"/>
+          </a:ln>
+        </p:spPr>
+        <p:style>
+          <a:lnRef idx="2">
+            <a:schemeClr val="accent1"/>
+          </a:lnRef>
+          <a:fillRef idx="0">
+            <a:schemeClr val="accent1"/>
+          </a:fillRef>
+          <a:effectRef idx="1">
+            <a:schemeClr val="accent1"/>
+          </a:effectRef>
+          <a:fontRef idx="minor">
+            <a:schemeClr val="tx1"/>
+          </a:fontRef>
+        </p:style>
+      </p:cxnSp>
+      <p:cxnSp>
+        <p:nvCxnSpPr>
+          <p:cNvPr id="70" name="Connector 69"/>
+          <p:cNvCxnSpPr>
+            <a:stCxn id="46" idx="3"/>
+            <a:endCxn id="32" idx="1"/>
+          </p:cNvCxnSpPr>
+          <p:nvPr/>
+        </p:nvCxnSpPr>
+        <p:spPr>
+          <a:xfrm flipV="1">
+            <a:off x="1700000" y="2724000"/>
+            <a:ext cx="8480000" cy="3445994"/>
+          </a:xfrm>
+          <a:prstGeom prst="bentConnector3">
+            <a:avLst/>
+          </a:prstGeom>
+          <a:ln>
+            <a:tailEnd type="triangle"/>
+          </a:ln>
+        </p:spPr>
+        <p:style>
+          <a:lnRef idx="2">
+            <a:schemeClr val="accent1"/>
+          </a:lnRef>
+          <a:fillRef idx="0">
+            <a:schemeClr val="accent1"/>
+          </a:fillRef>
+          <a:effectRef idx="1">
+            <a:schemeClr val="accent1"/>
+          </a:effectRef>
+          <a:fontRef idx="minor">
+            <a:schemeClr val="tx1"/>
+          </a:fontRef>
+        </p:style>
+      </p:cxnSp>
+      <p:cxnSp>
+        <p:nvCxnSpPr>
+          <p:cNvPr id="71" name="Connector 70"/>
+          <p:cNvCxnSpPr>
             <a:stCxn id="30" idx="2"/>
-            <a:endCxn id="36" idx="0"/>
+            <a:endCxn id="38" idx="0"/>
           </p:cNvCxnSpPr>
           <p:nvPr/>
         </p:nvCxnSpPr>
         <p:spPr>
           <a:xfrm>
             <a:off x="11135000" y="1660000"/>
-            <a:ext cx="0" cy="4174000"/>
+            <a:ext cx="0" cy="6388000"/>
           </a:xfrm>
           <a:prstGeom prst="line">
             <a:avLst/>
